--- a/Отчётность_2027-2030.pptx
+++ b/Отчётность_2027-2030.pptx
@@ -1139,12 +1139,12 @@
         </p:nvSpPr>
         <p:spPr>
           <a:xfrm>
-            <a:off x="457200" y="1417320"/>
-            <a:ext cx="5257800" cy="2286000"/>
+            <a:off x="457200" y="1371600"/>
+            <a:ext cx="5257800" cy="1691640"/>
           </a:xfrm>
           <a:prstGeom prst="roundRect">
             <a:avLst>
-              <a:gd name="adj" fmla="val 2800"/>
+              <a:gd name="adj" fmla="val 3784"/>
             </a:avLst>
           </a:prstGeom>
           <a:solidFill>
@@ -1161,8 +1161,8 @@
         </p:nvSpPr>
         <p:spPr>
           <a:xfrm>
-            <a:off x="640080" y="1581912"/>
-            <a:ext cx="457200" cy="457200"/>
+            <a:off x="621792" y="1499616"/>
+            <a:ext cx="384048" cy="384048"/>
           </a:xfrm>
           <a:prstGeom prst="ellipse">
             <a:avLst/>
@@ -1189,8 +1189,8 @@
         </p:blipFill>
         <p:spPr>
           <a:xfrm>
-            <a:off x="763524" y="1705356"/>
-            <a:ext cx="210312" cy="210312"/>
+            <a:off x="725485" y="1603309"/>
+            <a:ext cx="176662" cy="176662"/>
           </a:xfrm>
           <a:prstGeom prst="rect">
             <a:avLst/>
@@ -1205,24 +1205,24 @@
         </p:nvSpPr>
         <p:spPr>
           <a:xfrm>
-            <a:off x="1234440" y="1563624"/>
-            <a:ext cx="4297680" cy="502920"/>
-          </a:xfrm>
-          <a:prstGeom prst="rect">
-            <a:avLst/>
-          </a:prstGeom>
-          <a:noFill/>
-          <a:ln/>
-        </p:spPr>
-        <p:txBody>
-          <a:bodyPr wrap="square" lIns="0" tIns="0" rIns="0" bIns="0" rtlCol="0" anchor="ctr"/>
-          <a:lstStyle/>
-          <a:p>
-            <a:pPr indent="0" marL="0">
-              <a:buNone/>
-            </a:pPr>
-            <a:r>
-              <a:rPr lang="en-US" sz="1450" b="1" dirty="0">
+            <a:off x="1115568" y="1481328"/>
+            <a:ext cx="4434840" cy="420624"/>
+          </a:xfrm>
+          <a:prstGeom prst="rect">
+            <a:avLst/>
+          </a:prstGeom>
+          <a:noFill/>
+          <a:ln/>
+        </p:spPr>
+        <p:txBody>
+          <a:bodyPr wrap="square" lIns="0" tIns="0" rIns="0" bIns="0" rtlCol="0" anchor="ctr"/>
+          <a:lstStyle/>
+          <a:p>
+            <a:pPr indent="0" marL="0">
+              <a:buNone/>
+            </a:pPr>
+            <a:r>
+              <a:rPr lang="en-US" sz="1300" b="1" dirty="0">
                 <a:solidFill>
                   <a:srgbClr val="1E2761"/>
                 </a:solidFill>
@@ -1232,7 +1232,7 @@
               </a:rPr>
               <a:t>1. Качество данных</a:t>
             </a:r>
-            <a:endParaRPr lang="en-US" sz="1450" dirty="0"/>
+            <a:endParaRPr lang="en-US" sz="1300" dirty="0"/>
           </a:p>
         </p:txBody>
       </p:sp>
@@ -1244,8 +1244,8 @@
         </p:nvSpPr>
         <p:spPr>
           <a:xfrm>
-            <a:off x="640080" y="2130552"/>
-            <a:ext cx="4892040" cy="0"/>
+            <a:off x="621792" y="1901952"/>
+            <a:ext cx="4928616" cy="0"/>
           </a:xfrm>
           <a:prstGeom prst="line">
             <a:avLst/>
@@ -1267,24 +1267,24 @@
         </p:nvSpPr>
         <p:spPr>
           <a:xfrm>
-            <a:off x="640080" y="2258568"/>
-            <a:ext cx="2400300" cy="256032"/>
-          </a:xfrm>
-          <a:prstGeom prst="rect">
-            <a:avLst/>
-          </a:prstGeom>
-          <a:noFill/>
-          <a:ln/>
-        </p:spPr>
-        <p:txBody>
-          <a:bodyPr wrap="square" lIns="0" tIns="0" rIns="0" bIns="0" rtlCol="0" anchor="ctr"/>
-          <a:lstStyle/>
-          <a:p>
-            <a:pPr indent="0" marL="0">
-              <a:buNone/>
-            </a:pPr>
-            <a:r>
-              <a:rPr lang="en-US" sz="1000" b="1" spc="100" kern="0" dirty="0">
+            <a:off x="621792" y="1993392"/>
+            <a:ext cx="2418588" cy="219456"/>
+          </a:xfrm>
+          <a:prstGeom prst="rect">
+            <a:avLst/>
+          </a:prstGeom>
+          <a:noFill/>
+          <a:ln/>
+        </p:spPr>
+        <p:txBody>
+          <a:bodyPr wrap="square" lIns="0" tIns="0" rIns="0" bIns="0" rtlCol="0" anchor="ctr"/>
+          <a:lstStyle/>
+          <a:p>
+            <a:pPr indent="0" marL="0">
+              <a:buNone/>
+            </a:pPr>
+            <a:r>
+              <a:rPr lang="en-US" sz="950" b="1" spc="100" kern="0" dirty="0">
                 <a:solidFill>
                   <a:srgbClr val="6B7280"/>
                 </a:solidFill>
@@ -1294,7 +1294,7 @@
               </a:rPr>
               <a:t>ТОПЫ</a:t>
             </a:r>
-            <a:endParaRPr lang="en-US" sz="1000" dirty="0"/>
+            <a:endParaRPr lang="en-US" sz="950" dirty="0"/>
           </a:p>
         </p:txBody>
       </p:sp>
@@ -1306,8 +1306,8 @@
         </p:nvSpPr>
         <p:spPr>
           <a:xfrm>
-            <a:off x="640080" y="2514600"/>
-            <a:ext cx="2400300" cy="1097280"/>
+            <a:off x="621792" y="2212848"/>
+            <a:ext cx="2418588" cy="850392"/>
           </a:xfrm>
           <a:prstGeom prst="rect">
             <a:avLst/>
@@ -1321,7 +1321,7 @@
           <a:p>
             <a:pPr indent="0" marL="0">
               <a:lnSpc>
-                <a:spcPct val="115000"/>
+                <a:spcPct val="110000"/>
               </a:lnSpc>
               <a:buNone/>
             </a:pPr>
@@ -1338,7 +1338,7 @@
             </a:r>
             <a:pPr indent="0" marL="0">
               <a:lnSpc>
-                <a:spcPct val="115000"/>
+                <a:spcPct val="110000"/>
               </a:lnSpc>
               <a:buNone/>
             </a:pPr>
@@ -1351,12 +1351,12 @@
                 <a:ea typeface="Calibri" pitchFamily="34" charset="-122"/>
                 <a:cs typeface="Calibri" pitchFamily="34" charset="-120"/>
               </a:rPr>
-              <a:t>выше доверие к цифрам, меньше споров "чьи данные верны"
+              <a:t>выше доверие к цифрам
 </a:t>
             </a:r>
             <a:pPr indent="0" marL="0">
               <a:lnSpc>
-                <a:spcPct val="115000"/>
+                <a:spcPct val="110000"/>
               </a:lnSpc>
               <a:buNone/>
             </a:pPr>
@@ -1373,7 +1373,7 @@
             </a:r>
             <a:pPr indent="0" marL="0">
               <a:lnSpc>
-                <a:spcPct val="115000"/>
+                <a:spcPct val="110000"/>
               </a:lnSpc>
               <a:buNone/>
             </a:pPr>
@@ -1386,7 +1386,7 @@
                 <a:ea typeface="Calibri" pitchFamily="34" charset="-122"/>
                 <a:cs typeface="Calibri" pitchFamily="34" charset="-120"/>
               </a:rPr>
-              <a:t>не даёт нового функционала здесь и сейчас</a:t>
+              <a:t>не даёт нового здесь и сейчас</a:t>
             </a:r>
             <a:endParaRPr lang="en-US" sz="950" dirty="0"/>
           </a:p>
@@ -1400,24 +1400,24 @@
         </p:nvSpPr>
         <p:spPr>
           <a:xfrm>
-            <a:off x="3131820" y="2258568"/>
-            <a:ext cx="2400300" cy="256032"/>
-          </a:xfrm>
-          <a:prstGeom prst="rect">
-            <a:avLst/>
-          </a:prstGeom>
-          <a:noFill/>
-          <a:ln/>
-        </p:spPr>
-        <p:txBody>
-          <a:bodyPr wrap="square" lIns="0" tIns="0" rIns="0" bIns="0" rtlCol="0" anchor="ctr"/>
-          <a:lstStyle/>
-          <a:p>
-            <a:pPr indent="0" marL="0">
-              <a:buNone/>
-            </a:pPr>
-            <a:r>
-              <a:rPr lang="en-US" sz="1000" b="1" spc="100" kern="0" dirty="0">
+            <a:off x="3131820" y="1993392"/>
+            <a:ext cx="2418588" cy="219456"/>
+          </a:xfrm>
+          <a:prstGeom prst="rect">
+            <a:avLst/>
+          </a:prstGeom>
+          <a:noFill/>
+          <a:ln/>
+        </p:spPr>
+        <p:txBody>
+          <a:bodyPr wrap="square" lIns="0" tIns="0" rIns="0" bIns="0" rtlCol="0" anchor="ctr"/>
+          <a:lstStyle/>
+          <a:p>
+            <a:pPr indent="0" marL="0">
+              <a:buNone/>
+            </a:pPr>
+            <a:r>
+              <a:rPr lang="en-US" sz="950" b="1" spc="100" kern="0" dirty="0">
                 <a:solidFill>
                   <a:srgbClr val="6B7280"/>
                 </a:solidFill>
@@ -1427,7 +1427,7 @@
               </a:rPr>
               <a:t>БИЗНЕС</a:t>
             </a:r>
-            <a:endParaRPr lang="en-US" sz="1000" dirty="0"/>
+            <a:endParaRPr lang="en-US" sz="950" dirty="0"/>
           </a:p>
         </p:txBody>
       </p:sp>
@@ -1439,8 +1439,8 @@
         </p:nvSpPr>
         <p:spPr>
           <a:xfrm>
-            <a:off x="3131820" y="2514600"/>
-            <a:ext cx="2400300" cy="1097280"/>
+            <a:off x="3131820" y="2212848"/>
+            <a:ext cx="2418588" cy="850392"/>
           </a:xfrm>
           <a:prstGeom prst="rect">
             <a:avLst/>
@@ -1454,7 +1454,7 @@
           <a:p>
             <a:pPr indent="0" marL="0">
               <a:lnSpc>
-                <a:spcPct val="115000"/>
+                <a:spcPct val="110000"/>
               </a:lnSpc>
               <a:buNone/>
             </a:pPr>
@@ -1471,7 +1471,7 @@
             </a:r>
             <a:pPr indent="0" marL="0">
               <a:lnSpc>
-                <a:spcPct val="115000"/>
+                <a:spcPct val="110000"/>
               </a:lnSpc>
               <a:buNone/>
             </a:pPr>
@@ -1484,12 +1484,12 @@
                 <a:ea typeface="Calibri" pitchFamily="34" charset="-122"/>
                 <a:cs typeface="Calibri" pitchFamily="34" charset="-120"/>
               </a:rPr>
-              <a:t>меньше ручной сверки и очистки данных
+              <a:t>меньше ручной сверки данных
 </a:t>
             </a:r>
             <a:pPr indent="0" marL="0">
               <a:lnSpc>
-                <a:spcPct val="115000"/>
+                <a:spcPct val="110000"/>
               </a:lnSpc>
               <a:buNone/>
             </a:pPr>
@@ -1506,7 +1506,7 @@
             </a:r>
             <a:pPr indent="0" marL="0">
               <a:lnSpc>
-                <a:spcPct val="115000"/>
+                <a:spcPct val="110000"/>
               </a:lnSpc>
               <a:buNone/>
             </a:pPr>
@@ -1519,7 +1519,7 @@
                 <a:ea typeface="Calibri" pitchFamily="34" charset="-122"/>
                 <a:cs typeface="Calibri" pitchFamily="34" charset="-120"/>
               </a:rPr>
-              <a:t>ценность не видна сразу, инвестиции "невидимы"</a:t>
+              <a:t>ценность не видна сразу</a:t>
             </a:r>
             <a:endParaRPr lang="en-US" sz="950" dirty="0"/>
           </a:p>
@@ -1533,12 +1533,12 @@
         </p:nvSpPr>
         <p:spPr>
           <a:xfrm>
-            <a:off x="6473952" y="1417320"/>
-            <a:ext cx="5257800" cy="2286000"/>
+            <a:off x="6473952" y="1371600"/>
+            <a:ext cx="5257800" cy="1691640"/>
           </a:xfrm>
           <a:prstGeom prst="roundRect">
             <a:avLst>
-              <a:gd name="adj" fmla="val 2800"/>
+              <a:gd name="adj" fmla="val 3784"/>
             </a:avLst>
           </a:prstGeom>
           <a:solidFill>
@@ -1555,8 +1555,8 @@
         </p:nvSpPr>
         <p:spPr>
           <a:xfrm>
-            <a:off x="6656832" y="1581912"/>
-            <a:ext cx="457200" cy="457200"/>
+            <a:off x="6638544" y="1499616"/>
+            <a:ext cx="384048" cy="384048"/>
           </a:xfrm>
           <a:prstGeom prst="ellipse">
             <a:avLst/>
@@ -1583,8 +1583,8 @@
         </p:blipFill>
         <p:spPr>
           <a:xfrm>
-            <a:off x="6780276" y="1705356"/>
-            <a:ext cx="210312" cy="210312"/>
+            <a:off x="6742237" y="1603309"/>
+            <a:ext cx="176662" cy="176662"/>
           </a:xfrm>
           <a:prstGeom prst="rect">
             <a:avLst/>
@@ -1599,24 +1599,24 @@
         </p:nvSpPr>
         <p:spPr>
           <a:xfrm>
-            <a:off x="7251192" y="1563624"/>
-            <a:ext cx="4297680" cy="502920"/>
-          </a:xfrm>
-          <a:prstGeom prst="rect">
-            <a:avLst/>
-          </a:prstGeom>
-          <a:noFill/>
-          <a:ln/>
-        </p:spPr>
-        <p:txBody>
-          <a:bodyPr wrap="square" lIns="0" tIns="0" rIns="0" bIns="0" rtlCol="0" anchor="ctr"/>
-          <a:lstStyle/>
-          <a:p>
-            <a:pPr indent="0" marL="0">
-              <a:buNone/>
-            </a:pPr>
-            <a:r>
-              <a:rPr lang="en-US" sz="1450" b="1" dirty="0">
+            <a:off x="7132320" y="1481328"/>
+            <a:ext cx="4434840" cy="420624"/>
+          </a:xfrm>
+          <a:prstGeom prst="rect">
+            <a:avLst/>
+          </a:prstGeom>
+          <a:noFill/>
+          <a:ln/>
+        </p:spPr>
+        <p:txBody>
+          <a:bodyPr wrap="square" lIns="0" tIns="0" rIns="0" bIns="0" rtlCol="0" anchor="ctr"/>
+          <a:lstStyle/>
+          <a:p>
+            <a:pPr indent="0" marL="0">
+              <a:buNone/>
+            </a:pPr>
+            <a:r>
+              <a:rPr lang="en-US" sz="1300" b="1" dirty="0">
                 <a:solidFill>
                   <a:srgbClr val="1E2761"/>
                 </a:solidFill>
@@ -1626,7 +1626,7 @@
               </a:rPr>
               <a:t>2. Количество отчётов (в продукты)</a:t>
             </a:r>
-            <a:endParaRPr lang="en-US" sz="1450" dirty="0"/>
+            <a:endParaRPr lang="en-US" sz="1300" dirty="0"/>
           </a:p>
         </p:txBody>
       </p:sp>
@@ -1638,8 +1638,8 @@
         </p:nvSpPr>
         <p:spPr>
           <a:xfrm>
-            <a:off x="6656832" y="2130552"/>
-            <a:ext cx="4892040" cy="0"/>
+            <a:off x="6638544" y="1901952"/>
+            <a:ext cx="4928616" cy="0"/>
           </a:xfrm>
           <a:prstGeom prst="line">
             <a:avLst/>
@@ -1661,24 +1661,24 @@
         </p:nvSpPr>
         <p:spPr>
           <a:xfrm>
-            <a:off x="6656832" y="2258568"/>
-            <a:ext cx="2400300" cy="256032"/>
-          </a:xfrm>
-          <a:prstGeom prst="rect">
-            <a:avLst/>
-          </a:prstGeom>
-          <a:noFill/>
-          <a:ln/>
-        </p:spPr>
-        <p:txBody>
-          <a:bodyPr wrap="square" lIns="0" tIns="0" rIns="0" bIns="0" rtlCol="0" anchor="ctr"/>
-          <a:lstStyle/>
-          <a:p>
-            <a:pPr indent="0" marL="0">
-              <a:buNone/>
-            </a:pPr>
-            <a:r>
-              <a:rPr lang="en-US" sz="1000" b="1" spc="100" kern="0" dirty="0">
+            <a:off x="6638544" y="1993392"/>
+            <a:ext cx="2418588" cy="219456"/>
+          </a:xfrm>
+          <a:prstGeom prst="rect">
+            <a:avLst/>
+          </a:prstGeom>
+          <a:noFill/>
+          <a:ln/>
+        </p:spPr>
+        <p:txBody>
+          <a:bodyPr wrap="square" lIns="0" tIns="0" rIns="0" bIns="0" rtlCol="0" anchor="ctr"/>
+          <a:lstStyle/>
+          <a:p>
+            <a:pPr indent="0" marL="0">
+              <a:buNone/>
+            </a:pPr>
+            <a:r>
+              <a:rPr lang="en-US" sz="950" b="1" spc="100" kern="0" dirty="0">
                 <a:solidFill>
                   <a:srgbClr val="6B7280"/>
                 </a:solidFill>
@@ -1688,7 +1688,7 @@
               </a:rPr>
               <a:t>ТОПЫ</a:t>
             </a:r>
-            <a:endParaRPr lang="en-US" sz="1000" dirty="0"/>
+            <a:endParaRPr lang="en-US" sz="950" dirty="0"/>
           </a:p>
         </p:txBody>
       </p:sp>
@@ -1700,8 +1700,8 @@
         </p:nvSpPr>
         <p:spPr>
           <a:xfrm>
-            <a:off x="6656832" y="2514600"/>
-            <a:ext cx="2400300" cy="1097280"/>
+            <a:off x="6638544" y="2212848"/>
+            <a:ext cx="2418588" cy="850392"/>
           </a:xfrm>
           <a:prstGeom prst="rect">
             <a:avLst/>
@@ -1715,7 +1715,7 @@
           <a:p>
             <a:pPr indent="0" marL="0">
               <a:lnSpc>
-                <a:spcPct val="115000"/>
+                <a:spcPct val="110000"/>
               </a:lnSpc>
               <a:buNone/>
             </a:pPr>
@@ -1732,7 +1732,7 @@
             </a:r>
             <a:pPr indent="0" marL="0">
               <a:lnSpc>
-                <a:spcPct val="115000"/>
+                <a:spcPct val="110000"/>
               </a:lnSpc>
               <a:buNone/>
             </a:pPr>
@@ -1750,7 +1750,7 @@
             </a:r>
             <a:pPr indent="0" marL="0">
               <a:lnSpc>
-                <a:spcPct val="115000"/>
+                <a:spcPct val="110000"/>
               </a:lnSpc>
               <a:buNone/>
             </a:pPr>
@@ -1767,7 +1767,7 @@
             </a:r>
             <a:pPr indent="0" marL="0">
               <a:lnSpc>
-                <a:spcPct val="115000"/>
+                <a:spcPct val="110000"/>
               </a:lnSpc>
               <a:buNone/>
             </a:pPr>
@@ -1794,24 +1794,24 @@
         </p:nvSpPr>
         <p:spPr>
           <a:xfrm>
-            <a:off x="9148572" y="2258568"/>
-            <a:ext cx="2400300" cy="256032"/>
-          </a:xfrm>
-          <a:prstGeom prst="rect">
-            <a:avLst/>
-          </a:prstGeom>
-          <a:noFill/>
-          <a:ln/>
-        </p:spPr>
-        <p:txBody>
-          <a:bodyPr wrap="square" lIns="0" tIns="0" rIns="0" bIns="0" rtlCol="0" anchor="ctr"/>
-          <a:lstStyle/>
-          <a:p>
-            <a:pPr indent="0" marL="0">
-              <a:buNone/>
-            </a:pPr>
-            <a:r>
-              <a:rPr lang="en-US" sz="1000" b="1" spc="100" kern="0" dirty="0">
+            <a:off x="9148572" y="1993392"/>
+            <a:ext cx="2418588" cy="219456"/>
+          </a:xfrm>
+          <a:prstGeom prst="rect">
+            <a:avLst/>
+          </a:prstGeom>
+          <a:noFill/>
+          <a:ln/>
+        </p:spPr>
+        <p:txBody>
+          <a:bodyPr wrap="square" lIns="0" tIns="0" rIns="0" bIns="0" rtlCol="0" anchor="ctr"/>
+          <a:lstStyle/>
+          <a:p>
+            <a:pPr indent="0" marL="0">
+              <a:buNone/>
+            </a:pPr>
+            <a:r>
+              <a:rPr lang="en-US" sz="950" b="1" spc="100" kern="0" dirty="0">
                 <a:solidFill>
                   <a:srgbClr val="6B7280"/>
                 </a:solidFill>
@@ -1821,7 +1821,7 @@
               </a:rPr>
               <a:t>БИЗНЕС</a:t>
             </a:r>
-            <a:endParaRPr lang="en-US" sz="1000" dirty="0"/>
+            <a:endParaRPr lang="en-US" sz="950" dirty="0"/>
           </a:p>
         </p:txBody>
       </p:sp>
@@ -1833,8 +1833,8 @@
         </p:nvSpPr>
         <p:spPr>
           <a:xfrm>
-            <a:off x="9148572" y="2514600"/>
-            <a:ext cx="2400300" cy="1097280"/>
+            <a:off x="9148572" y="2212848"/>
+            <a:ext cx="2418588" cy="850392"/>
           </a:xfrm>
           <a:prstGeom prst="rect">
             <a:avLst/>
@@ -1848,7 +1848,7 @@
           <a:p>
             <a:pPr indent="0" marL="0">
               <a:lnSpc>
-                <a:spcPct val="115000"/>
+                <a:spcPct val="110000"/>
               </a:lnSpc>
               <a:buNone/>
             </a:pPr>
@@ -1865,7 +1865,7 @@
             </a:r>
             <a:pPr indent="0" marL="0">
               <a:lnSpc>
-                <a:spcPct val="115000"/>
+                <a:spcPct val="110000"/>
               </a:lnSpc>
               <a:buNone/>
             </a:pPr>
@@ -1878,12 +1878,12 @@
                 <a:ea typeface="Calibri" pitchFamily="34" charset="-122"/>
                 <a:cs typeface="Calibri" pitchFamily="34" charset="-120"/>
               </a:rPr>
-              <a:t>больше автономии у продуктовых команд
+              <a:t>больше автономии у продуктов
 </a:t>
             </a:r>
             <a:pPr indent="0" marL="0">
               <a:lnSpc>
-                <a:spcPct val="115000"/>
+                <a:spcPct val="110000"/>
               </a:lnSpc>
               <a:buNone/>
             </a:pPr>
@@ -1900,7 +1900,7 @@
             </a:r>
             <a:pPr indent="0" marL="0">
               <a:lnSpc>
-                <a:spcPct val="115000"/>
+                <a:spcPct val="110000"/>
               </a:lnSpc>
               <a:buNone/>
             </a:pPr>
@@ -1913,7 +1913,7 @@
                 <a:ea typeface="Calibri" pitchFamily="34" charset="-122"/>
                 <a:cs typeface="Calibri" pitchFamily="34" charset="-120"/>
               </a:rPr>
-              <a:t>дублирование логики, никто не поддерживает</a:t>
+              <a:t>дублирование, никто не поддерживает</a:t>
             </a:r>
             <a:endParaRPr lang="en-US" sz="950" dirty="0"/>
           </a:p>
@@ -1927,12 +1927,12 @@
         </p:nvSpPr>
         <p:spPr>
           <a:xfrm>
-            <a:off x="457200" y="4480560"/>
-            <a:ext cx="5257800" cy="2286000"/>
+            <a:off x="457200" y="3200400"/>
+            <a:ext cx="5257800" cy="1691640"/>
           </a:xfrm>
           <a:prstGeom prst="roundRect">
             <a:avLst>
-              <a:gd name="adj" fmla="val 2800"/>
+              <a:gd name="adj" fmla="val 3784"/>
             </a:avLst>
           </a:prstGeom>
           <a:solidFill>
@@ -1949,8 +1949,8 @@
         </p:nvSpPr>
         <p:spPr>
           <a:xfrm>
-            <a:off x="640080" y="4645152"/>
-            <a:ext cx="457200" cy="457200"/>
+            <a:off x="621792" y="3328416"/>
+            <a:ext cx="384048" cy="384048"/>
           </a:xfrm>
           <a:prstGeom prst="ellipse">
             <a:avLst/>
@@ -1977,8 +1977,8 @@
         </p:blipFill>
         <p:spPr>
           <a:xfrm>
-            <a:off x="763524" y="4768596"/>
-            <a:ext cx="210312" cy="210312"/>
+            <a:off x="725485" y="3432109"/>
+            <a:ext cx="176662" cy="176662"/>
           </a:xfrm>
           <a:prstGeom prst="rect">
             <a:avLst/>
@@ -1993,24 +1993,24 @@
         </p:nvSpPr>
         <p:spPr>
           <a:xfrm>
-            <a:off x="1234440" y="4626864"/>
-            <a:ext cx="4297680" cy="502920"/>
-          </a:xfrm>
-          <a:prstGeom prst="rect">
-            <a:avLst/>
-          </a:prstGeom>
-          <a:noFill/>
-          <a:ln/>
-        </p:spPr>
-        <p:txBody>
-          <a:bodyPr wrap="square" lIns="0" tIns="0" rIns="0" bIns="0" rtlCol="0" anchor="ctr"/>
-          <a:lstStyle/>
-          <a:p>
-            <a:pPr indent="0" marL="0">
-              <a:buNone/>
-            </a:pPr>
-            <a:r>
-              <a:rPr lang="en-US" sz="1450" b="1" dirty="0">
+            <a:off x="1115568" y="3310128"/>
+            <a:ext cx="4434840" cy="420624"/>
+          </a:xfrm>
+          <a:prstGeom prst="rect">
+            <a:avLst/>
+          </a:prstGeom>
+          <a:noFill/>
+          <a:ln/>
+        </p:spPr>
+        <p:txBody>
+          <a:bodyPr wrap="square" lIns="0" tIns="0" rIns="0" bIns="0" rtlCol="0" anchor="ctr"/>
+          <a:lstStyle/>
+          <a:p>
+            <a:pPr indent="0" marL="0">
+              <a:buNone/>
+            </a:pPr>
+            <a:r>
+              <a:rPr lang="en-US" sz="1300" b="1" dirty="0">
                 <a:solidFill>
                   <a:srgbClr val="1E2761"/>
                 </a:solidFill>
@@ -2020,7 +2020,7 @@
               </a:rPr>
               <a:t>3. Глубина: прогнозы, триггеры, рекомендации</a:t>
             </a:r>
-            <a:endParaRPr lang="en-US" sz="1450" dirty="0"/>
+            <a:endParaRPr lang="en-US" sz="1300" dirty="0"/>
           </a:p>
         </p:txBody>
       </p:sp>
@@ -2032,8 +2032,8 @@
         </p:nvSpPr>
         <p:spPr>
           <a:xfrm>
-            <a:off x="640080" y="5193792"/>
-            <a:ext cx="4892040" cy="0"/>
+            <a:off x="621792" y="3730752"/>
+            <a:ext cx="4928616" cy="0"/>
           </a:xfrm>
           <a:prstGeom prst="line">
             <a:avLst/>
@@ -2055,24 +2055,24 @@
         </p:nvSpPr>
         <p:spPr>
           <a:xfrm>
-            <a:off x="640080" y="5321808"/>
-            <a:ext cx="2400300" cy="256032"/>
-          </a:xfrm>
-          <a:prstGeom prst="rect">
-            <a:avLst/>
-          </a:prstGeom>
-          <a:noFill/>
-          <a:ln/>
-        </p:spPr>
-        <p:txBody>
-          <a:bodyPr wrap="square" lIns="0" tIns="0" rIns="0" bIns="0" rtlCol="0" anchor="ctr"/>
-          <a:lstStyle/>
-          <a:p>
-            <a:pPr indent="0" marL="0">
-              <a:buNone/>
-            </a:pPr>
-            <a:r>
-              <a:rPr lang="en-US" sz="1000" b="1" spc="100" kern="0" dirty="0">
+            <a:off x="621792" y="3822192"/>
+            <a:ext cx="2418588" cy="219456"/>
+          </a:xfrm>
+          <a:prstGeom prst="rect">
+            <a:avLst/>
+          </a:prstGeom>
+          <a:noFill/>
+          <a:ln/>
+        </p:spPr>
+        <p:txBody>
+          <a:bodyPr wrap="square" lIns="0" tIns="0" rIns="0" bIns="0" rtlCol="0" anchor="ctr"/>
+          <a:lstStyle/>
+          <a:p>
+            <a:pPr indent="0" marL="0">
+              <a:buNone/>
+            </a:pPr>
+            <a:r>
+              <a:rPr lang="en-US" sz="950" b="1" spc="100" kern="0" dirty="0">
                 <a:solidFill>
                   <a:srgbClr val="6B7280"/>
                 </a:solidFill>
@@ -2082,7 +2082,7 @@
               </a:rPr>
               <a:t>ТОПЫ</a:t>
             </a:r>
-            <a:endParaRPr lang="en-US" sz="1000" dirty="0"/>
+            <a:endParaRPr lang="en-US" sz="950" dirty="0"/>
           </a:p>
         </p:txBody>
       </p:sp>
@@ -2094,8 +2094,8 @@
         </p:nvSpPr>
         <p:spPr>
           <a:xfrm>
-            <a:off x="640080" y="5577840"/>
-            <a:ext cx="2400300" cy="1097280"/>
+            <a:off x="621792" y="4041648"/>
+            <a:ext cx="2418588" cy="850392"/>
           </a:xfrm>
           <a:prstGeom prst="rect">
             <a:avLst/>
@@ -2109,7 +2109,7 @@
           <a:p>
             <a:pPr indent="0" marL="0">
               <a:lnSpc>
-                <a:spcPct val="115000"/>
+                <a:spcPct val="110000"/>
               </a:lnSpc>
               <a:buNone/>
             </a:pPr>
@@ -2126,7 +2126,7 @@
             </a:r>
             <a:pPr indent="0" marL="0">
               <a:lnSpc>
-                <a:spcPct val="115000"/>
+                <a:spcPct val="110000"/>
               </a:lnSpc>
               <a:buNone/>
             </a:pPr>
@@ -2139,12 +2139,12 @@
                 <a:ea typeface="Calibri" pitchFamily="34" charset="-122"/>
                 <a:cs typeface="Calibri" pitchFamily="34" charset="-120"/>
               </a:rPr>
-              <a:t>готовая причина и рекомендация, а не сырые цифры
+              <a:t>готовый ответ, а не сырые цифры
 </a:t>
             </a:r>
             <a:pPr indent="0" marL="0">
               <a:lnSpc>
-                <a:spcPct val="115000"/>
+                <a:spcPct val="110000"/>
               </a:lnSpc>
               <a:buNone/>
             </a:pPr>
@@ -2161,7 +2161,7 @@
             </a:r>
             <a:pPr indent="0" marL="0">
               <a:lnSpc>
-                <a:spcPct val="115000"/>
+                <a:spcPct val="110000"/>
               </a:lnSpc>
               <a:buNone/>
             </a:pPr>
@@ -2174,7 +2174,7 @@
                 <a:ea typeface="Calibri" pitchFamily="34" charset="-122"/>
                 <a:cs typeface="Calibri" pitchFamily="34" charset="-120"/>
               </a:rPr>
-              <a:t>часть кейсов методологически не ясна (риски, сложные прогнозы)</a:t>
+              <a:t>часть кейсов не ясна методологически</a:t>
             </a:r>
             <a:endParaRPr lang="en-US" sz="950" dirty="0"/>
           </a:p>
@@ -2188,24 +2188,24 @@
         </p:nvSpPr>
         <p:spPr>
           <a:xfrm>
-            <a:off x="3131820" y="5321808"/>
-            <a:ext cx="2400300" cy="256032"/>
-          </a:xfrm>
-          <a:prstGeom prst="rect">
-            <a:avLst/>
-          </a:prstGeom>
-          <a:noFill/>
-          <a:ln/>
-        </p:spPr>
-        <p:txBody>
-          <a:bodyPr wrap="square" lIns="0" tIns="0" rIns="0" bIns="0" rtlCol="0" anchor="ctr"/>
-          <a:lstStyle/>
-          <a:p>
-            <a:pPr indent="0" marL="0">
-              <a:buNone/>
-            </a:pPr>
-            <a:r>
-              <a:rPr lang="en-US" sz="1000" b="1" spc="100" kern="0" dirty="0">
+            <a:off x="3131820" y="3822192"/>
+            <a:ext cx="2418588" cy="219456"/>
+          </a:xfrm>
+          <a:prstGeom prst="rect">
+            <a:avLst/>
+          </a:prstGeom>
+          <a:noFill/>
+          <a:ln/>
+        </p:spPr>
+        <p:txBody>
+          <a:bodyPr wrap="square" lIns="0" tIns="0" rIns="0" bIns="0" rtlCol="0" anchor="ctr"/>
+          <a:lstStyle/>
+          <a:p>
+            <a:pPr indent="0" marL="0">
+              <a:buNone/>
+            </a:pPr>
+            <a:r>
+              <a:rPr lang="en-US" sz="950" b="1" spc="100" kern="0" dirty="0">
                 <a:solidFill>
                   <a:srgbClr val="6B7280"/>
                 </a:solidFill>
@@ -2215,7 +2215,7 @@
               </a:rPr>
               <a:t>БИЗНЕС</a:t>
             </a:r>
-            <a:endParaRPr lang="en-US" sz="1000" dirty="0"/>
+            <a:endParaRPr lang="en-US" sz="950" dirty="0"/>
           </a:p>
         </p:txBody>
       </p:sp>
@@ -2227,8 +2227,8 @@
         </p:nvSpPr>
         <p:spPr>
           <a:xfrm>
-            <a:off x="3131820" y="5577840"/>
-            <a:ext cx="2400300" cy="1097280"/>
+            <a:off x="3131820" y="4041648"/>
+            <a:ext cx="2418588" cy="850392"/>
           </a:xfrm>
           <a:prstGeom prst="rect">
             <a:avLst/>
@@ -2242,7 +2242,7 @@
           <a:p>
             <a:pPr indent="0" marL="0">
               <a:lnSpc>
-                <a:spcPct val="115000"/>
+                <a:spcPct val="110000"/>
               </a:lnSpc>
               <a:buNone/>
             </a:pPr>
@@ -2259,7 +2259,7 @@
             </a:r>
             <a:pPr indent="0" marL="0">
               <a:lnSpc>
-                <a:spcPct val="115000"/>
+                <a:spcPct val="110000"/>
               </a:lnSpc>
               <a:buNone/>
             </a:pPr>
@@ -2272,12 +2272,12 @@
                 <a:ea typeface="Calibri" pitchFamily="34" charset="-122"/>
                 <a:cs typeface="Calibri" pitchFamily="34" charset="-120"/>
               </a:rPr>
-              <a:t>аналитики освобождаются от рутины
+              <a:t>аналитики свободны от рутины
 </a:t>
             </a:r>
             <a:pPr indent="0" marL="0">
               <a:lnSpc>
-                <a:spcPct val="115000"/>
+                <a:spcPct val="110000"/>
               </a:lnSpc>
               <a:buNone/>
             </a:pPr>
@@ -2294,7 +2294,7 @@
             </a:r>
             <a:pPr indent="0" marL="0">
               <a:lnSpc>
-                <a:spcPct val="115000"/>
+                <a:spcPct val="110000"/>
               </a:lnSpc>
               <a:buNone/>
             </a:pPr>
@@ -2307,7 +2307,7 @@
                 <a:ea typeface="Calibri" pitchFamily="34" charset="-122"/>
                 <a:cs typeface="Calibri" pitchFamily="34" charset="-120"/>
               </a:rPr>
-              <a:t>риск ложных рекомендаций, нужна верификация</a:t>
+              <a:t>риск ложных рекомендаций</a:t>
             </a:r>
             <a:endParaRPr lang="en-US" sz="950" dirty="0"/>
           </a:p>
@@ -2321,12 +2321,12 @@
         </p:nvSpPr>
         <p:spPr>
           <a:xfrm>
-            <a:off x="6473952" y="4480560"/>
-            <a:ext cx="5257800" cy="2286000"/>
+            <a:off x="6473952" y="3200400"/>
+            <a:ext cx="5257800" cy="1691640"/>
           </a:xfrm>
           <a:prstGeom prst="roundRect">
             <a:avLst>
-              <a:gd name="adj" fmla="val 2800"/>
+              <a:gd name="adj" fmla="val 3784"/>
             </a:avLst>
           </a:prstGeom>
           <a:solidFill>
@@ -2343,8 +2343,8 @@
         </p:nvSpPr>
         <p:spPr>
           <a:xfrm>
-            <a:off x="6656832" y="4645152"/>
-            <a:ext cx="457200" cy="457200"/>
+            <a:off x="6638544" y="3328416"/>
+            <a:ext cx="384048" cy="384048"/>
           </a:xfrm>
           <a:prstGeom prst="ellipse">
             <a:avLst/>
@@ -2371,8 +2371,8 @@
         </p:blipFill>
         <p:spPr>
           <a:xfrm>
-            <a:off x="6780276" y="4768596"/>
-            <a:ext cx="210312" cy="210312"/>
+            <a:off x="6742237" y="3432109"/>
+            <a:ext cx="176662" cy="176662"/>
           </a:xfrm>
           <a:prstGeom prst="rect">
             <a:avLst/>
@@ -2387,24 +2387,24 @@
         </p:nvSpPr>
         <p:spPr>
           <a:xfrm>
-            <a:off x="7251192" y="4626864"/>
-            <a:ext cx="4297680" cy="502920"/>
-          </a:xfrm>
-          <a:prstGeom prst="rect">
-            <a:avLst/>
-          </a:prstGeom>
-          <a:noFill/>
-          <a:ln/>
-        </p:spPr>
-        <p:txBody>
-          <a:bodyPr wrap="square" lIns="0" tIns="0" rIns="0" bIns="0" rtlCol="0" anchor="ctr"/>
-          <a:lstStyle/>
-          <a:p>
-            <a:pPr indent="0" marL="0">
-              <a:buNone/>
-            </a:pPr>
-            <a:r>
-              <a:rPr lang="en-US" sz="1450" b="1" dirty="0">
+            <a:off x="7132320" y="3310128"/>
+            <a:ext cx="4434840" cy="420624"/>
+          </a:xfrm>
+          <a:prstGeom prst="rect">
+            <a:avLst/>
+          </a:prstGeom>
+          <a:noFill/>
+          <a:ln/>
+        </p:spPr>
+        <p:txBody>
+          <a:bodyPr wrap="square" lIns="0" tIns="0" rIns="0" bIns="0" rtlCol="0" anchor="ctr"/>
+          <a:lstStyle/>
+          <a:p>
+            <a:pPr indent="0" marL="0">
+              <a:buNone/>
+            </a:pPr>
+            <a:r>
+              <a:rPr lang="en-US" sz="1300" b="1" dirty="0">
                 <a:solidFill>
                   <a:srgbClr val="1E2761"/>
                 </a:solidFill>
@@ -2414,7 +2414,7 @@
               </a:rPr>
               <a:t>4. Интерактивность</a:t>
             </a:r>
-            <a:endParaRPr lang="en-US" sz="1450" dirty="0"/>
+            <a:endParaRPr lang="en-US" sz="1300" dirty="0"/>
           </a:p>
         </p:txBody>
       </p:sp>
@@ -2426,8 +2426,8 @@
         </p:nvSpPr>
         <p:spPr>
           <a:xfrm>
-            <a:off x="6656832" y="5193792"/>
-            <a:ext cx="4892040" cy="0"/>
+            <a:off x="6638544" y="3730752"/>
+            <a:ext cx="4928616" cy="0"/>
           </a:xfrm>
           <a:prstGeom prst="line">
             <a:avLst/>
@@ -2449,24 +2449,24 @@
         </p:nvSpPr>
         <p:spPr>
           <a:xfrm>
-            <a:off x="6656832" y="5321808"/>
-            <a:ext cx="2400300" cy="256032"/>
-          </a:xfrm>
-          <a:prstGeom prst="rect">
-            <a:avLst/>
-          </a:prstGeom>
-          <a:noFill/>
-          <a:ln/>
-        </p:spPr>
-        <p:txBody>
-          <a:bodyPr wrap="square" lIns="0" tIns="0" rIns="0" bIns="0" rtlCol="0" anchor="ctr"/>
-          <a:lstStyle/>
-          <a:p>
-            <a:pPr indent="0" marL="0">
-              <a:buNone/>
-            </a:pPr>
-            <a:r>
-              <a:rPr lang="en-US" sz="1000" b="1" spc="100" kern="0" dirty="0">
+            <a:off x="6638544" y="3822192"/>
+            <a:ext cx="2418588" cy="219456"/>
+          </a:xfrm>
+          <a:prstGeom prst="rect">
+            <a:avLst/>
+          </a:prstGeom>
+          <a:noFill/>
+          <a:ln/>
+        </p:spPr>
+        <p:txBody>
+          <a:bodyPr wrap="square" lIns="0" tIns="0" rIns="0" bIns="0" rtlCol="0" anchor="ctr"/>
+          <a:lstStyle/>
+          <a:p>
+            <a:pPr indent="0" marL="0">
+              <a:buNone/>
+            </a:pPr>
+            <a:r>
+              <a:rPr lang="en-US" sz="950" b="1" spc="100" kern="0" dirty="0">
                 <a:solidFill>
                   <a:srgbClr val="6B7280"/>
                 </a:solidFill>
@@ -2476,7 +2476,7 @@
               </a:rPr>
               <a:t>ТОПЫ</a:t>
             </a:r>
-            <a:endParaRPr lang="en-US" sz="1000" dirty="0"/>
+            <a:endParaRPr lang="en-US" sz="950" dirty="0"/>
           </a:p>
         </p:txBody>
       </p:sp>
@@ -2488,8 +2488,8 @@
         </p:nvSpPr>
         <p:spPr>
           <a:xfrm>
-            <a:off x="6656832" y="5577840"/>
-            <a:ext cx="2400300" cy="1097280"/>
+            <a:off x="6638544" y="4041648"/>
+            <a:ext cx="2418588" cy="850392"/>
           </a:xfrm>
           <a:prstGeom prst="rect">
             <a:avLst/>
@@ -2503,7 +2503,7 @@
           <a:p>
             <a:pPr indent="0" marL="0">
               <a:lnSpc>
-                <a:spcPct val="115000"/>
+                <a:spcPct val="110000"/>
               </a:lnSpc>
               <a:buNone/>
             </a:pPr>
@@ -2520,7 +2520,7 @@
             </a:r>
             <a:pPr indent="0" marL="0">
               <a:lnSpc>
-                <a:spcPct val="115000"/>
+                <a:spcPct val="110000"/>
               </a:lnSpc>
               <a:buNone/>
             </a:pPr>
@@ -2533,12 +2533,12 @@
                 <a:ea typeface="Calibri" pitchFamily="34" charset="-122"/>
                 <a:cs typeface="Calibri" pitchFamily="34" charset="-120"/>
               </a:rPr>
-              <a:t>можно спросить и сразу получить ответ
+              <a:t>можно спросить и получить ответ
 </a:t>
             </a:r>
             <a:pPr indent="0" marL="0">
               <a:lnSpc>
-                <a:spcPct val="115000"/>
+                <a:spcPct val="110000"/>
               </a:lnSpc>
               <a:buNone/>
             </a:pPr>
@@ -2555,7 +2555,7 @@
             </a:r>
             <a:pPr indent="0" marL="0">
               <a:lnSpc>
-                <a:spcPct val="115000"/>
+                <a:spcPct val="110000"/>
               </a:lnSpc>
               <a:buNone/>
             </a:pPr>
@@ -2568,7 +2568,7 @@
                 <a:ea typeface="Calibri" pitchFamily="34" charset="-122"/>
                 <a:cs typeface="Calibri" pitchFamily="34" charset="-120"/>
               </a:rPr>
-              <a:t>не все топы будут этим пользоваться</a:t>
+              <a:t>не все топы будут пользоваться</a:t>
             </a:r>
             <a:endParaRPr lang="en-US" sz="950" dirty="0"/>
           </a:p>
@@ -2582,24 +2582,24 @@
         </p:nvSpPr>
         <p:spPr>
           <a:xfrm>
-            <a:off x="9148572" y="5321808"/>
-            <a:ext cx="2400300" cy="256032"/>
-          </a:xfrm>
-          <a:prstGeom prst="rect">
-            <a:avLst/>
-          </a:prstGeom>
-          <a:noFill/>
-          <a:ln/>
-        </p:spPr>
-        <p:txBody>
-          <a:bodyPr wrap="square" lIns="0" tIns="0" rIns="0" bIns="0" rtlCol="0" anchor="ctr"/>
-          <a:lstStyle/>
-          <a:p>
-            <a:pPr indent="0" marL="0">
-              <a:buNone/>
-            </a:pPr>
-            <a:r>
-              <a:rPr lang="en-US" sz="1000" b="1" spc="100" kern="0" dirty="0">
+            <a:off x="9148572" y="3822192"/>
+            <a:ext cx="2418588" cy="219456"/>
+          </a:xfrm>
+          <a:prstGeom prst="rect">
+            <a:avLst/>
+          </a:prstGeom>
+          <a:noFill/>
+          <a:ln/>
+        </p:spPr>
+        <p:txBody>
+          <a:bodyPr wrap="square" lIns="0" tIns="0" rIns="0" bIns="0" rtlCol="0" anchor="ctr"/>
+          <a:lstStyle/>
+          <a:p>
+            <a:pPr indent="0" marL="0">
+              <a:buNone/>
+            </a:pPr>
+            <a:r>
+              <a:rPr lang="en-US" sz="950" b="1" spc="100" kern="0" dirty="0">
                 <a:solidFill>
                   <a:srgbClr val="6B7280"/>
                 </a:solidFill>
@@ -2609,7 +2609,7 @@
               </a:rPr>
               <a:t>БИЗНЕС</a:t>
             </a:r>
-            <a:endParaRPr lang="en-US" sz="1000" dirty="0"/>
+            <a:endParaRPr lang="en-US" sz="950" dirty="0"/>
           </a:p>
         </p:txBody>
       </p:sp>
@@ -2621,8 +2621,8 @@
         </p:nvSpPr>
         <p:spPr>
           <a:xfrm>
-            <a:off x="9148572" y="5577840"/>
-            <a:ext cx="2400300" cy="1097280"/>
+            <a:off x="9148572" y="4041648"/>
+            <a:ext cx="2418588" cy="850392"/>
           </a:xfrm>
           <a:prstGeom prst="rect">
             <a:avLst/>
@@ -2636,7 +2636,7 @@
           <a:p>
             <a:pPr indent="0" marL="0">
               <a:lnSpc>
-                <a:spcPct val="115000"/>
+                <a:spcPct val="110000"/>
               </a:lnSpc>
               <a:buNone/>
             </a:pPr>
@@ -2653,7 +2653,7 @@
             </a:r>
             <a:pPr indent="0" marL="0">
               <a:lnSpc>
-                <a:spcPct val="115000"/>
+                <a:spcPct val="110000"/>
               </a:lnSpc>
               <a:buNone/>
             </a:pPr>
@@ -2666,12 +2666,12 @@
                 <a:ea typeface="Calibri" pitchFamily="34" charset="-122"/>
                 <a:cs typeface="Calibri" pitchFamily="34" charset="-120"/>
               </a:rPr>
-              <a:t>самообслуживание, быстрее ответы на вопросы
+              <a:t>самообслуживание, быстрый ответ
 </a:t>
             </a:r>
             <a:pPr indent="0" marL="0">
               <a:lnSpc>
-                <a:spcPct val="115000"/>
+                <a:spcPct val="110000"/>
               </a:lnSpc>
               <a:buNone/>
             </a:pPr>
@@ -2688,7 +2688,7 @@
             </a:r>
             <a:pPr indent="0" marL="0">
               <a:lnSpc>
-                <a:spcPct val="115000"/>
+                <a:spcPct val="110000"/>
               </a:lnSpc>
               <a:buNone/>
             </a:pPr>
@@ -2701,7 +2701,7 @@
                 <a:ea typeface="Calibri" pitchFamily="34" charset="-122"/>
                 <a:cs typeface="Calibri" pitchFamily="34" charset="-120"/>
               </a:rPr>
-              <a:t>риск неверной трактовки без методологической опоры</a:t>
+              <a:t>риск неверной трактовки</a:t>
             </a:r>
             <a:endParaRPr lang="en-US" sz="950" dirty="0"/>
           </a:p>
@@ -2715,62 +2715,395 @@
         </p:nvSpPr>
         <p:spPr>
           <a:xfrm>
-            <a:off x="4448556" y="3749040"/>
-            <a:ext cx="3291840" cy="685800"/>
+            <a:off x="457200" y="5029200"/>
+            <a:ext cx="11274552" cy="1280160"/>
           </a:xfrm>
           <a:prstGeom prst="roundRect">
             <a:avLst>
-              <a:gd name="adj" fmla="val 10667"/>
+              <a:gd name="adj" fmla="val 5000"/>
             </a:avLst>
           </a:prstGeom>
           <a:solidFill>
+            <a:srgbClr val="F4F6FC"/>
+          </a:solidFill>
+          <a:ln/>
+        </p:spPr>
+      </p:sp>
+      <p:sp>
+        <p:nvSpPr>
+          <p:cNvPr id="41" name="Shape 35"/>
+          <p:cNvSpPr/>
+          <p:nvPr/>
+        </p:nvSpPr>
+        <p:spPr>
+          <a:xfrm>
+            <a:off x="621792" y="5157216"/>
+            <a:ext cx="384048" cy="384048"/>
+          </a:xfrm>
+          <a:prstGeom prst="ellipse">
+            <a:avLst/>
+          </a:prstGeom>
+          <a:solidFill>
             <a:srgbClr val="1E2761"/>
           </a:solidFill>
           <a:ln/>
         </p:spPr>
       </p:sp>
-      <p:sp>
-        <p:nvSpPr>
-          <p:cNvPr id="41" name="Text 35"/>
-          <p:cNvSpPr/>
-          <p:nvPr/>
-        </p:nvSpPr>
-        <p:spPr>
-          <a:xfrm>
-            <a:off x="4585716" y="3749040"/>
-            <a:ext cx="3017520" cy="685800"/>
-          </a:xfrm>
-          <a:prstGeom prst="rect">
-            <a:avLst/>
-          </a:prstGeom>
-          <a:noFill/>
-          <a:ln/>
-        </p:spPr>
-        <p:txBody>
-          <a:bodyPr wrap="square" lIns="0" tIns="0" rIns="0" bIns="0" rtlCol="0" anchor="ctr"/>
-          <a:lstStyle/>
-          <a:p>
-            <a:pPr algn="ctr" indent="0" marL="0">
-              <a:buNone/>
-            </a:pPr>
-            <a:r>
-              <a:rPr lang="en-US" sz="1150" b="1" dirty="0">
-                <a:solidFill>
-                  <a:srgbClr val="FFFFFF"/>
-                </a:solidFill>
-                <a:latin typeface="Calibri" pitchFamily="34" charset="0"/>
-                <a:ea typeface="Calibri" pitchFamily="34" charset="-122"/>
-                <a:cs typeface="Calibri" pitchFamily="34" charset="-120"/>
-              </a:rPr>
-              <a:t>Любая ветка требует: единый слой метрик + владелец курации</a:t>
-            </a:r>
-            <a:endParaRPr lang="en-US" sz="1150" dirty="0"/>
-          </a:p>
-        </p:txBody>
-      </p:sp>
-      <p:sp>
-        <p:nvSpPr>
-          <p:cNvPr id="42" name="Text 36"/>
+      <p:pic>
+        <p:nvPicPr>
+          <p:cNvPr id="42" name="Image 4" descr="/home/claude/pptx_project/icons/filter_white.png">    </p:cNvPr>
+          <p:cNvPicPr>
+            <a:picLocks noChangeAspect="1"/>
+          </p:cNvPicPr>
+          <p:nvPr/>
+        </p:nvPicPr>
+        <p:blipFill>
+          <a:blip r:embed="rId5"/>
+          <a:stretch>
+            <a:fillRect/>
+          </a:stretch>
+        </p:blipFill>
+        <p:spPr>
+          <a:xfrm>
+            <a:off x="725485" y="5260909"/>
+            <a:ext cx="176662" cy="176662"/>
+          </a:xfrm>
+          <a:prstGeom prst="rect">
+            <a:avLst/>
+          </a:prstGeom>
+        </p:spPr>
+      </p:pic>
+      <p:sp>
+        <p:nvSpPr>
+          <p:cNvPr id="43" name="Text 36"/>
+          <p:cNvSpPr/>
+          <p:nvPr/>
+        </p:nvSpPr>
+        <p:spPr>
+          <a:xfrm>
+            <a:off x="1115568" y="5138928"/>
+            <a:ext cx="10451592" cy="420624"/>
+          </a:xfrm>
+          <a:prstGeom prst="rect">
+            <a:avLst/>
+          </a:prstGeom>
+          <a:noFill/>
+          <a:ln/>
+        </p:spPr>
+        <p:txBody>
+          <a:bodyPr wrap="square" lIns="0" tIns="0" rIns="0" bIns="0" rtlCol="0" anchor="ctr"/>
+          <a:lstStyle/>
+          <a:p>
+            <a:pPr indent="0" marL="0">
+              <a:buNone/>
+            </a:pPr>
+            <a:r>
+              <a:rPr lang="en-US" sz="1300" b="1" dirty="0">
+                <a:solidFill>
+                  <a:srgbClr val="1E2761"/>
+                </a:solidFill>
+                <a:latin typeface="Cambria" pitchFamily="34" charset="0"/>
+                <a:ea typeface="Cambria" pitchFamily="34" charset="-122"/>
+                <a:cs typeface="Cambria" pitchFamily="34" charset="-120"/>
+              </a:rPr>
+              <a:t>5. Governance: курация и пороги</a:t>
+            </a:r>
+            <a:endParaRPr lang="en-US" sz="1300" dirty="0"/>
+          </a:p>
+        </p:txBody>
+      </p:sp>
+      <p:sp>
+        <p:nvSpPr>
+          <p:cNvPr id="44" name="Shape 37"/>
+          <p:cNvSpPr/>
+          <p:nvPr/>
+        </p:nvSpPr>
+        <p:spPr>
+          <a:xfrm>
+            <a:off x="621792" y="5559552"/>
+            <a:ext cx="10945368" cy="0"/>
+          </a:xfrm>
+          <a:prstGeom prst="line">
+            <a:avLst/>
+          </a:prstGeom>
+          <a:noFill/>
+          <a:ln w="12700">
+            <a:solidFill>
+              <a:srgbClr val="CADCFC"/>
+            </a:solidFill>
+            <a:prstDash val="solid"/>
+          </a:ln>
+        </p:spPr>
+      </p:sp>
+      <p:sp>
+        <p:nvSpPr>
+          <p:cNvPr id="45" name="Text 38"/>
+          <p:cNvSpPr/>
+          <p:nvPr/>
+        </p:nvSpPr>
+        <p:spPr>
+          <a:xfrm>
+            <a:off x="621792" y="5650992"/>
+            <a:ext cx="5426964" cy="219456"/>
+          </a:xfrm>
+          <a:prstGeom prst="rect">
+            <a:avLst/>
+          </a:prstGeom>
+          <a:noFill/>
+          <a:ln/>
+        </p:spPr>
+        <p:txBody>
+          <a:bodyPr wrap="square" lIns="0" tIns="0" rIns="0" bIns="0" rtlCol="0" anchor="ctr"/>
+          <a:lstStyle/>
+          <a:p>
+            <a:pPr indent="0" marL="0">
+              <a:buNone/>
+            </a:pPr>
+            <a:r>
+              <a:rPr lang="en-US" sz="950" b="1" spc="100" kern="0" dirty="0">
+                <a:solidFill>
+                  <a:srgbClr val="6B7280"/>
+                </a:solidFill>
+                <a:latin typeface="Calibri" pitchFamily="34" charset="0"/>
+                <a:ea typeface="Calibri" pitchFamily="34" charset="-122"/>
+                <a:cs typeface="Calibri" pitchFamily="34" charset="-120"/>
+              </a:rPr>
+              <a:t>ТОПЫ</a:t>
+            </a:r>
+            <a:endParaRPr lang="en-US" sz="950" dirty="0"/>
+          </a:p>
+        </p:txBody>
+      </p:sp>
+      <p:sp>
+        <p:nvSpPr>
+          <p:cNvPr id="46" name="Text 39"/>
+          <p:cNvSpPr/>
+          <p:nvPr/>
+        </p:nvSpPr>
+        <p:spPr>
+          <a:xfrm>
+            <a:off x="621792" y="5870448"/>
+            <a:ext cx="5426964" cy="438912"/>
+          </a:xfrm>
+          <a:prstGeom prst="rect">
+            <a:avLst/>
+          </a:prstGeom>
+          <a:noFill/>
+          <a:ln/>
+        </p:spPr>
+        <p:txBody>
+          <a:bodyPr wrap="square" lIns="0" tIns="0" rIns="0" bIns="0" rtlCol="0" anchor="t"/>
+          <a:lstStyle/>
+          <a:p>
+            <a:pPr indent="0" marL="0">
+              <a:lnSpc>
+                <a:spcPct val="110000"/>
+              </a:lnSpc>
+              <a:buNone/>
+            </a:pPr>
+            <a:r>
+              <a:rPr lang="en-US" sz="950" b="1" dirty="0">
+                <a:solidFill>
+                  <a:srgbClr val="1E2761"/>
+                </a:solidFill>
+                <a:latin typeface="Calibri" pitchFamily="34" charset="0"/>
+                <a:ea typeface="Calibri" pitchFamily="34" charset="-122"/>
+                <a:cs typeface="Calibri" pitchFamily="34" charset="-120"/>
+              </a:rPr>
+              <a:t>+ </a:t>
+            </a:r>
+            <a:pPr indent="0" marL="0">
+              <a:lnSpc>
+                <a:spcPct val="110000"/>
+              </a:lnSpc>
+              <a:buNone/>
+            </a:pPr>
+            <a:r>
+              <a:rPr lang="en-US" sz="950" dirty="0">
+                <a:solidFill>
+                  <a:srgbClr val="2A2A2A"/>
+                </a:solidFill>
+                <a:latin typeface="Calibri" pitchFamily="34" charset="0"/>
+                <a:ea typeface="Calibri" pitchFamily="34" charset="-122"/>
+                <a:cs typeface="Calibri" pitchFamily="34" charset="-120"/>
+              </a:rPr>
+              <a:t>видит только значимое, не тонет в шуме
+</a:t>
+            </a:r>
+            <a:pPr indent="0" marL="0">
+              <a:lnSpc>
+                <a:spcPct val="110000"/>
+              </a:lnSpc>
+              <a:buNone/>
+            </a:pPr>
+            <a:r>
+              <a:rPr lang="en-US" sz="950" b="1" dirty="0">
+                <a:solidFill>
+                  <a:srgbClr val="E8A33D"/>
+                </a:solidFill>
+                <a:latin typeface="Calibri" pitchFamily="34" charset="0"/>
+                <a:ea typeface="Calibri" pitchFamily="34" charset="-122"/>
+                <a:cs typeface="Calibri" pitchFamily="34" charset="-120"/>
+              </a:rPr>
+              <a:t>– </a:t>
+            </a:r>
+            <a:pPr indent="0" marL="0">
+              <a:lnSpc>
+                <a:spcPct val="110000"/>
+              </a:lnSpc>
+              <a:buNone/>
+            </a:pPr>
+            <a:r>
+              <a:rPr lang="en-US" sz="950" dirty="0">
+                <a:solidFill>
+                  <a:srgbClr val="2A2A2A"/>
+                </a:solidFill>
+                <a:latin typeface="Calibri" pitchFamily="34" charset="0"/>
+                <a:ea typeface="Calibri" pitchFamily="34" charset="-122"/>
+                <a:cs typeface="Calibri" pitchFamily="34" charset="-120"/>
+              </a:rPr>
+              <a:t>нужен явный владелец, кто отвечает за фильтр</a:t>
+            </a:r>
+            <a:endParaRPr lang="en-US" sz="950" dirty="0"/>
+          </a:p>
+        </p:txBody>
+      </p:sp>
+      <p:sp>
+        <p:nvSpPr>
+          <p:cNvPr id="47" name="Text 40"/>
+          <p:cNvSpPr/>
+          <p:nvPr/>
+        </p:nvSpPr>
+        <p:spPr>
+          <a:xfrm>
+            <a:off x="6140196" y="5650992"/>
+            <a:ext cx="5426964" cy="219456"/>
+          </a:xfrm>
+          <a:prstGeom prst="rect">
+            <a:avLst/>
+          </a:prstGeom>
+          <a:noFill/>
+          <a:ln/>
+        </p:spPr>
+        <p:txBody>
+          <a:bodyPr wrap="square" lIns="0" tIns="0" rIns="0" bIns="0" rtlCol="0" anchor="ctr"/>
+          <a:lstStyle/>
+          <a:p>
+            <a:pPr indent="0" marL="0">
+              <a:buNone/>
+            </a:pPr>
+            <a:r>
+              <a:rPr lang="en-US" sz="950" b="1" spc="100" kern="0" dirty="0">
+                <a:solidFill>
+                  <a:srgbClr val="6B7280"/>
+                </a:solidFill>
+                <a:latin typeface="Calibri" pitchFamily="34" charset="0"/>
+                <a:ea typeface="Calibri" pitchFamily="34" charset="-122"/>
+                <a:cs typeface="Calibri" pitchFamily="34" charset="-120"/>
+              </a:rPr>
+              <a:t>БИЗНЕС</a:t>
+            </a:r>
+            <a:endParaRPr lang="en-US" sz="950" dirty="0"/>
+          </a:p>
+        </p:txBody>
+      </p:sp>
+      <p:sp>
+        <p:nvSpPr>
+          <p:cNvPr id="48" name="Text 41"/>
+          <p:cNvSpPr/>
+          <p:nvPr/>
+        </p:nvSpPr>
+        <p:spPr>
+          <a:xfrm>
+            <a:off x="6140196" y="5870448"/>
+            <a:ext cx="5426964" cy="438912"/>
+          </a:xfrm>
+          <a:prstGeom prst="rect">
+            <a:avLst/>
+          </a:prstGeom>
+          <a:noFill/>
+          <a:ln/>
+        </p:spPr>
+        <p:txBody>
+          <a:bodyPr wrap="square" lIns="0" tIns="0" rIns="0" bIns="0" rtlCol="0" anchor="t"/>
+          <a:lstStyle/>
+          <a:p>
+            <a:pPr indent="0" marL="0">
+              <a:lnSpc>
+                <a:spcPct val="110000"/>
+              </a:lnSpc>
+              <a:buNone/>
+            </a:pPr>
+            <a:r>
+              <a:rPr lang="en-US" sz="950" b="1" dirty="0">
+                <a:solidFill>
+                  <a:srgbClr val="1E2761"/>
+                </a:solidFill>
+                <a:latin typeface="Calibri" pitchFamily="34" charset="0"/>
+                <a:ea typeface="Calibri" pitchFamily="34" charset="-122"/>
+                <a:cs typeface="Calibri" pitchFamily="34" charset="-120"/>
+              </a:rPr>
+              <a:t>+ </a:t>
+            </a:r>
+            <a:pPr indent="0" marL="0">
+              <a:lnSpc>
+                <a:spcPct val="110000"/>
+              </a:lnSpc>
+              <a:buNone/>
+            </a:pPr>
+            <a:r>
+              <a:rPr lang="en-US" sz="950" dirty="0">
+                <a:solidFill>
+                  <a:srgbClr val="2A2A2A"/>
+                </a:solidFill>
+                <a:latin typeface="Calibri" pitchFamily="34" charset="0"/>
+                <a:ea typeface="Calibri" pitchFamily="34" charset="-122"/>
+                <a:cs typeface="Calibri" pitchFamily="34" charset="-120"/>
+              </a:rPr>
+              <a:t>меньше повторных уведомлений и лишних задач
+</a:t>
+            </a:r>
+            <a:pPr indent="0" marL="0">
+              <a:lnSpc>
+                <a:spcPct val="110000"/>
+              </a:lnSpc>
+              <a:buNone/>
+            </a:pPr>
+            <a:r>
+              <a:rPr lang="en-US" sz="950" b="1" dirty="0">
+                <a:solidFill>
+                  <a:srgbClr val="E8A33D"/>
+                </a:solidFill>
+                <a:latin typeface="Calibri" pitchFamily="34" charset="0"/>
+                <a:ea typeface="Calibri" pitchFamily="34" charset="-122"/>
+                <a:cs typeface="Calibri" pitchFamily="34" charset="-120"/>
+              </a:rPr>
+              <a:t>– </a:t>
+            </a:r>
+            <a:pPr indent="0" marL="0">
+              <a:lnSpc>
+                <a:spcPct val="110000"/>
+              </a:lnSpc>
+              <a:buNone/>
+            </a:pPr>
+            <a:r>
+              <a:rPr lang="en-US" sz="950" dirty="0">
+                <a:solidFill>
+                  <a:srgbClr val="2A2A2A"/>
+                </a:solidFill>
+                <a:latin typeface="Calibri" pitchFamily="34" charset="0"/>
+                <a:ea typeface="Calibri" pitchFamily="34" charset="-122"/>
+                <a:cs typeface="Calibri" pitchFamily="34" charset="-120"/>
+              </a:rPr>
+              <a:t>кто-то должен взять на себя роль фильтра</a:t>
+            </a:r>
+            <a:endParaRPr lang="en-US" sz="950" dirty="0"/>
+          </a:p>
+        </p:txBody>
+      </p:sp>
+      <p:sp>
+        <p:nvSpPr>
+          <p:cNvPr id="49" name="Text 42"/>
           <p:cNvSpPr/>
           <p:nvPr/>
         </p:nvSpPr>
@@ -2809,7 +3142,7 @@
       </p:sp>
       <p:sp>
         <p:nvSpPr>
-          <p:cNvPr id="43" name="Text 37"/>
+          <p:cNvPr id="50" name="Text 43"/>
           <p:cNvSpPr/>
           <p:nvPr/>
         </p:nvSpPr>
@@ -2925,12 +3258,12 @@
         </p:nvSpPr>
         <p:spPr>
           <a:xfrm>
-            <a:off x="3703320" y="1143000"/>
-            <a:ext cx="4800600" cy="4160520"/>
+            <a:off x="3703320" y="1097280"/>
+            <a:ext cx="4800600" cy="3794760"/>
           </a:xfrm>
           <a:prstGeom prst="roundRect">
             <a:avLst>
-              <a:gd name="adj" fmla="val 2198"/>
+              <a:gd name="adj" fmla="val 2410"/>
             </a:avLst>
           </a:prstGeom>
           <a:solidFill>
@@ -2947,8 +3280,8 @@
         </p:nvSpPr>
         <p:spPr>
           <a:xfrm>
-            <a:off x="3977640" y="1344168"/>
-            <a:ext cx="4251960" cy="320040"/>
+            <a:off x="3977640" y="1280160"/>
+            <a:ext cx="4251960" cy="292608"/>
           </a:xfrm>
           <a:prstGeom prst="rect">
             <a:avLst/>
@@ -2986,8 +3319,8 @@
         </p:nvSpPr>
         <p:spPr>
           <a:xfrm>
-            <a:off x="3977640" y="1828800"/>
-            <a:ext cx="548640" cy="548640"/>
+            <a:off x="3977640" y="1719072"/>
+            <a:ext cx="512064" cy="512064"/>
           </a:xfrm>
           <a:prstGeom prst="ellipse">
             <a:avLst/>
@@ -3014,8 +3347,8 @@
         </p:blipFill>
         <p:spPr>
           <a:xfrm>
-            <a:off x="4125773" y="1976933"/>
-            <a:ext cx="252374" cy="252374"/>
+            <a:off x="4115897" y="1857329"/>
+            <a:ext cx="235549" cy="235549"/>
           </a:xfrm>
           <a:prstGeom prst="rect">
             <a:avLst/>
@@ -3030,24 +3363,24 @@
         </p:nvSpPr>
         <p:spPr>
           <a:xfrm>
-            <a:off x="4709160" y="1801368"/>
-            <a:ext cx="3520440" cy="365760"/>
-          </a:xfrm>
-          <a:prstGeom prst="rect">
-            <a:avLst/>
-          </a:prstGeom>
-          <a:noFill/>
-          <a:ln/>
-        </p:spPr>
-        <p:txBody>
-          <a:bodyPr wrap="square" lIns="0" tIns="0" rIns="0" bIns="0" rtlCol="0" anchor="ctr"/>
-          <a:lstStyle/>
-          <a:p>
-            <a:pPr indent="0" marL="0">
-              <a:buNone/>
-            </a:pPr>
-            <a:r>
-              <a:rPr lang="en-US" sz="1350" b="1" dirty="0">
+            <a:off x="4663440" y="1691640"/>
+            <a:ext cx="3566160" cy="347472"/>
+          </a:xfrm>
+          <a:prstGeom prst="rect">
+            <a:avLst/>
+          </a:prstGeom>
+          <a:noFill/>
+          <a:ln/>
+        </p:spPr>
+        <p:txBody>
+          <a:bodyPr wrap="square" lIns="0" tIns="0" rIns="0" bIns="0" rtlCol="0" anchor="ctr"/>
+          <a:lstStyle/>
+          <a:p>
+            <a:pPr indent="0" marL="0">
+              <a:buNone/>
+            </a:pPr>
+            <a:r>
+              <a:rPr lang="en-US" sz="1300" b="1" dirty="0">
                 <a:solidFill>
                   <a:srgbClr val="FFFFFF"/>
                 </a:solidFill>
@@ -3055,9 +3388,9 @@
                 <a:ea typeface="Calibri" pitchFamily="34" charset="-122"/>
                 <a:cs typeface="Calibri" pitchFamily="34" charset="-120"/>
               </a:rPr>
-              <a:t>Чат на естественном языке</a:t>
-            </a:r>
-            <a:endParaRPr lang="en-US" sz="1350" dirty="0"/>
+              <a:t>Спросите — получите ответ</a:t>
+            </a:r>
+            <a:endParaRPr lang="en-US" sz="1300" dirty="0"/>
           </a:p>
         </p:txBody>
       </p:sp>
@@ -3069,24 +3402,24 @@
         </p:nvSpPr>
         <p:spPr>
           <a:xfrm>
-            <a:off x="4709160" y="2148840"/>
-            <a:ext cx="3520440" cy="365760"/>
-          </a:xfrm>
-          <a:prstGeom prst="rect">
-            <a:avLst/>
-          </a:prstGeom>
-          <a:noFill/>
-          <a:ln/>
-        </p:spPr>
-        <p:txBody>
-          <a:bodyPr wrap="square" lIns="0" tIns="0" rIns="0" bIns="0" rtlCol="0" anchor="ctr"/>
-          <a:lstStyle/>
-          <a:p>
-            <a:pPr indent="0" marL="0">
-              <a:buNone/>
-            </a:pPr>
-            <a:r>
-              <a:rPr lang="en-US" sz="1100" dirty="0">
+            <a:off x="4663440" y="2011680"/>
+            <a:ext cx="3566160" cy="347472"/>
+          </a:xfrm>
+          <a:prstGeom prst="rect">
+            <a:avLst/>
+          </a:prstGeom>
+          <a:noFill/>
+          <a:ln/>
+        </p:spPr>
+        <p:txBody>
+          <a:bodyPr wrap="square" lIns="0" tIns="0" rIns="0" bIns="0" rtlCol="0" anchor="ctr"/>
+          <a:lstStyle/>
+          <a:p>
+            <a:pPr indent="0" marL="0">
+              <a:buNone/>
+            </a:pPr>
+            <a:r>
+              <a:rPr lang="en-US" sz="1050" dirty="0">
                 <a:solidFill>
                   <a:srgbClr val="CADCFC"/>
                 </a:solidFill>
@@ -3094,9 +3427,9 @@
                 <a:ea typeface="Calibri" pitchFamily="34" charset="-122"/>
                 <a:cs typeface="Calibri" pitchFamily="34" charset="-120"/>
               </a:rPr>
-              <a:t>вопрос — ответ по данным</a:t>
-            </a:r>
-            <a:endParaRPr lang="en-US" sz="1100" dirty="0"/>
+              <a:t>на обычном языке, без похода к аналитику</a:t>
+            </a:r>
+            <a:endParaRPr lang="en-US" sz="1050" dirty="0"/>
           </a:p>
         </p:txBody>
       </p:sp>
@@ -3108,8 +3441,8 @@
         </p:nvSpPr>
         <p:spPr>
           <a:xfrm>
-            <a:off x="3977640" y="2670048"/>
-            <a:ext cx="548640" cy="548640"/>
+            <a:off x="3977640" y="2496312"/>
+            <a:ext cx="512064" cy="512064"/>
           </a:xfrm>
           <a:prstGeom prst="ellipse">
             <a:avLst/>
@@ -3136,8 +3469,8 @@
         </p:blipFill>
         <p:spPr>
           <a:xfrm>
-            <a:off x="4125773" y="2818181"/>
-            <a:ext cx="252374" cy="252374"/>
+            <a:off x="4115897" y="2634569"/>
+            <a:ext cx="235549" cy="235549"/>
           </a:xfrm>
           <a:prstGeom prst="rect">
             <a:avLst/>
@@ -3152,24 +3485,24 @@
         </p:nvSpPr>
         <p:spPr>
           <a:xfrm>
-            <a:off x="4709160" y="2642616"/>
-            <a:ext cx="3520440" cy="365760"/>
-          </a:xfrm>
-          <a:prstGeom prst="rect">
-            <a:avLst/>
-          </a:prstGeom>
-          <a:noFill/>
-          <a:ln/>
-        </p:spPr>
-        <p:txBody>
-          <a:bodyPr wrap="square" lIns="0" tIns="0" rIns="0" bIns="0" rtlCol="0" anchor="ctr"/>
-          <a:lstStyle/>
-          <a:p>
-            <a:pPr indent="0" marL="0">
-              <a:buNone/>
-            </a:pPr>
-            <a:r>
-              <a:rPr lang="en-US" sz="1350" b="1" dirty="0">
+            <a:off x="4663440" y="2468880"/>
+            <a:ext cx="3566160" cy="347472"/>
+          </a:xfrm>
+          <a:prstGeom prst="rect">
+            <a:avLst/>
+          </a:prstGeom>
+          <a:noFill/>
+          <a:ln/>
+        </p:spPr>
+        <p:txBody>
+          <a:bodyPr wrap="square" lIns="0" tIns="0" rIns="0" bIns="0" rtlCol="0" anchor="ctr"/>
+          <a:lstStyle/>
+          <a:p>
+            <a:pPr indent="0" marL="0">
+              <a:buNone/>
+            </a:pPr>
+            <a:r>
+              <a:rPr lang="en-US" sz="1300" b="1" dirty="0">
                 <a:solidFill>
                   <a:srgbClr val="FFFFFF"/>
                 </a:solidFill>
@@ -3179,7 +3512,7 @@
               </a:rPr>
               <a:t>«Обрати внимание»</a:t>
             </a:r>
-            <a:endParaRPr lang="en-US" sz="1350" dirty="0"/>
+            <a:endParaRPr lang="en-US" sz="1300" dirty="0"/>
           </a:p>
         </p:txBody>
       </p:sp>
@@ -3191,24 +3524,24 @@
         </p:nvSpPr>
         <p:spPr>
           <a:xfrm>
-            <a:off x="4709160" y="2990088"/>
-            <a:ext cx="3520440" cy="365760"/>
-          </a:xfrm>
-          <a:prstGeom prst="rect">
-            <a:avLst/>
-          </a:prstGeom>
-          <a:noFill/>
-          <a:ln/>
-        </p:spPr>
-        <p:txBody>
-          <a:bodyPr wrap="square" lIns="0" tIns="0" rIns="0" bIns="0" rtlCol="0" anchor="ctr"/>
-          <a:lstStyle/>
-          <a:p>
-            <a:pPr indent="0" marL="0">
-              <a:buNone/>
-            </a:pPr>
-            <a:r>
-              <a:rPr lang="en-US" sz="1100" dirty="0">
+            <a:off x="4663440" y="2788920"/>
+            <a:ext cx="3566160" cy="347472"/>
+          </a:xfrm>
+          <a:prstGeom prst="rect">
+            <a:avLst/>
+          </a:prstGeom>
+          <a:noFill/>
+          <a:ln/>
+        </p:spPr>
+        <p:txBody>
+          <a:bodyPr wrap="square" lIns="0" tIns="0" rIns="0" bIns="0" rtlCol="0" anchor="ctr"/>
+          <a:lstStyle/>
+          <a:p>
+            <a:pPr indent="0" marL="0">
+              <a:buNone/>
+            </a:pPr>
+            <a:r>
+              <a:rPr lang="en-US" sz="1050" dirty="0">
                 <a:solidFill>
                   <a:srgbClr val="CADCFC"/>
                 </a:solidFill>
@@ -3216,9 +3549,9 @@
                 <a:ea typeface="Calibri" pitchFamily="34" charset="-122"/>
                 <a:cs typeface="Calibri" pitchFamily="34" charset="-120"/>
               </a:rPr>
-              <a:t>проактивные инсайты на данных</a:t>
-            </a:r>
-            <a:endParaRPr lang="en-US" sz="1100" dirty="0"/>
+              <a:t>система сама укажет, что важно сейчас</a:t>
+            </a:r>
+            <a:endParaRPr lang="en-US" sz="1050" dirty="0"/>
           </a:p>
         </p:txBody>
       </p:sp>
@@ -3230,8 +3563,8 @@
         </p:nvSpPr>
         <p:spPr>
           <a:xfrm>
-            <a:off x="3977640" y="3511296"/>
-            <a:ext cx="548640" cy="548640"/>
+            <a:off x="3977640" y="3273552"/>
+            <a:ext cx="512064" cy="512064"/>
           </a:xfrm>
           <a:prstGeom prst="ellipse">
             <a:avLst/>
@@ -3258,8 +3591,8 @@
         </p:blipFill>
         <p:spPr>
           <a:xfrm>
-            <a:off x="4125773" y="3659429"/>
-            <a:ext cx="252374" cy="252374"/>
+            <a:off x="4115897" y="3411809"/>
+            <a:ext cx="235549" cy="235549"/>
           </a:xfrm>
           <a:prstGeom prst="rect">
             <a:avLst/>
@@ -3274,24 +3607,24 @@
         </p:nvSpPr>
         <p:spPr>
           <a:xfrm>
-            <a:off x="4709160" y="3483864"/>
-            <a:ext cx="3520440" cy="365760"/>
-          </a:xfrm>
-          <a:prstGeom prst="rect">
-            <a:avLst/>
-          </a:prstGeom>
-          <a:noFill/>
-          <a:ln/>
-        </p:spPr>
-        <p:txBody>
-          <a:bodyPr wrap="square" lIns="0" tIns="0" rIns="0" bIns="0" rtlCol="0" anchor="ctr"/>
-          <a:lstStyle/>
-          <a:p>
-            <a:pPr indent="0" marL="0">
-              <a:buNone/>
-            </a:pPr>
-            <a:r>
-              <a:rPr lang="en-US" sz="1350" b="1" dirty="0">
+            <a:off x="4663440" y="3246120"/>
+            <a:ext cx="3566160" cy="347472"/>
+          </a:xfrm>
+          <a:prstGeom prst="rect">
+            <a:avLst/>
+          </a:prstGeom>
+          <a:noFill/>
+          <a:ln/>
+        </p:spPr>
+        <p:txBody>
+          <a:bodyPr wrap="square" lIns="0" tIns="0" rIns="0" bIns="0" rtlCol="0" anchor="ctr"/>
+          <a:lstStyle/>
+          <a:p>
+            <a:pPr indent="0" marL="0">
+              <a:buNone/>
+            </a:pPr>
+            <a:r>
+              <a:rPr lang="en-US" sz="1300" b="1" dirty="0">
                 <a:solidFill>
                   <a:srgbClr val="FFFFFF"/>
                 </a:solidFill>
@@ -3299,9 +3632,9 @@
                 <a:ea typeface="Calibri" pitchFamily="34" charset="-122"/>
                 <a:cs typeface="Calibri" pitchFamily="34" charset="-120"/>
               </a:rPr>
-              <a:t>Автообнаружение</a:t>
-            </a:r>
-            <a:endParaRPr lang="en-US" sz="1350" dirty="0"/>
+              <a:t>Замечает раньше</a:t>
+            </a:r>
+            <a:endParaRPr lang="en-US" sz="1300" dirty="0"/>
           </a:p>
         </p:txBody>
       </p:sp>
@@ -3313,24 +3646,24 @@
         </p:nvSpPr>
         <p:spPr>
           <a:xfrm>
-            <a:off x="4709160" y="3831336"/>
-            <a:ext cx="3520440" cy="365760"/>
-          </a:xfrm>
-          <a:prstGeom prst="rect">
-            <a:avLst/>
-          </a:prstGeom>
-          <a:noFill/>
-          <a:ln/>
-        </p:spPr>
-        <p:txBody>
-          <a:bodyPr wrap="square" lIns="0" tIns="0" rIns="0" bIns="0" rtlCol="0" anchor="ctr"/>
-          <a:lstStyle/>
-          <a:p>
-            <a:pPr indent="0" marL="0">
-              <a:buNone/>
-            </a:pPr>
-            <a:r>
-              <a:rPr lang="en-US" sz="1100" dirty="0">
+            <a:off x="4663440" y="3566160"/>
+            <a:ext cx="3566160" cy="347472"/>
+          </a:xfrm>
+          <a:prstGeom prst="rect">
+            <a:avLst/>
+          </a:prstGeom>
+          <a:noFill/>
+          <a:ln/>
+        </p:spPr>
+        <p:txBody>
+          <a:bodyPr wrap="square" lIns="0" tIns="0" rIns="0" bIns="0" rtlCol="0" anchor="ctr"/>
+          <a:lstStyle/>
+          <a:p>
+            <a:pPr indent="0" marL="0">
+              <a:buNone/>
+            </a:pPr>
+            <a:r>
+              <a:rPr lang="en-US" sz="1050" dirty="0">
                 <a:solidFill>
                   <a:srgbClr val="CADCFC"/>
                 </a:solidFill>
@@ -3338,9 +3671,9 @@
                 <a:ea typeface="Calibri" pitchFamily="34" charset="-122"/>
                 <a:cs typeface="Calibri" pitchFamily="34" charset="-120"/>
               </a:rPr>
-              <a:t>фильтрация по значимости</a:t>
-            </a:r>
-            <a:endParaRPr lang="en-US" sz="1100" dirty="0"/>
+              <a:t>находит отклонения до совещания, а не после</a:t>
+            </a:r>
+            <a:endParaRPr lang="en-US" sz="1050" dirty="0"/>
           </a:p>
         </p:txBody>
       </p:sp>
@@ -3352,8 +3685,8 @@
         </p:nvSpPr>
         <p:spPr>
           <a:xfrm>
-            <a:off x="3977640" y="4352544"/>
-            <a:ext cx="548640" cy="548640"/>
+            <a:off x="3977640" y="4050792"/>
+            <a:ext cx="512064" cy="512064"/>
           </a:xfrm>
           <a:prstGeom prst="ellipse">
             <a:avLst/>
@@ -3380,8 +3713,8 @@
         </p:blipFill>
         <p:spPr>
           <a:xfrm>
-            <a:off x="4125773" y="4500677"/>
-            <a:ext cx="252374" cy="252374"/>
+            <a:off x="4115897" y="4189049"/>
+            <a:ext cx="235549" cy="235549"/>
           </a:xfrm>
           <a:prstGeom prst="rect">
             <a:avLst/>
@@ -3396,24 +3729,24 @@
         </p:nvSpPr>
         <p:spPr>
           <a:xfrm>
-            <a:off x="4709160" y="4325112"/>
-            <a:ext cx="3520440" cy="365760"/>
-          </a:xfrm>
-          <a:prstGeom prst="rect">
-            <a:avLst/>
-          </a:prstGeom>
-          <a:noFill/>
-          <a:ln/>
-        </p:spPr>
-        <p:txBody>
-          <a:bodyPr wrap="square" lIns="0" tIns="0" rIns="0" bIns="0" rtlCol="0" anchor="ctr"/>
-          <a:lstStyle/>
-          <a:p>
-            <a:pPr indent="0" marL="0">
-              <a:buNone/>
-            </a:pPr>
-            <a:r>
-              <a:rPr lang="en-US" sz="1350" b="1" dirty="0">
+            <a:off x="4663440" y="4023360"/>
+            <a:ext cx="3566160" cy="347472"/>
+          </a:xfrm>
+          <a:prstGeom prst="rect">
+            <a:avLst/>
+          </a:prstGeom>
+          <a:noFill/>
+          <a:ln/>
+        </p:spPr>
+        <p:txBody>
+          <a:bodyPr wrap="square" lIns="0" tIns="0" rIns="0" bIns="0" rtlCol="0" anchor="ctr"/>
+          <a:lstStyle/>
+          <a:p>
+            <a:pPr indent="0" marL="0">
+              <a:buNone/>
+            </a:pPr>
+            <a:r>
+              <a:rPr lang="en-US" sz="1300" b="1" dirty="0">
                 <a:solidFill>
                   <a:srgbClr val="FFFFFF"/>
                 </a:solidFill>
@@ -3421,9 +3754,9 @@
                 <a:ea typeface="Calibri" pitchFamily="34" charset="-122"/>
                 <a:cs typeface="Calibri" pitchFamily="34" charset="-120"/>
               </a:rPr>
-              <a:t>AI-функционал</a:t>
-            </a:r>
-            <a:endParaRPr lang="en-US" sz="1350" dirty="0"/>
+              <a:t>Готовый ответ, не только цифры</a:t>
+            </a:r>
+            <a:endParaRPr lang="en-US" sz="1300" dirty="0"/>
           </a:p>
         </p:txBody>
       </p:sp>
@@ -3435,24 +3768,24 @@
         </p:nvSpPr>
         <p:spPr>
           <a:xfrm>
-            <a:off x="4709160" y="4672584"/>
-            <a:ext cx="3520440" cy="365760"/>
-          </a:xfrm>
-          <a:prstGeom prst="rect">
-            <a:avLst/>
-          </a:prstGeom>
-          <a:noFill/>
-          <a:ln/>
-        </p:spPr>
-        <p:txBody>
-          <a:bodyPr wrap="square" lIns="0" tIns="0" rIns="0" bIns="0" rtlCol="0" anchor="ctr"/>
-          <a:lstStyle/>
-          <a:p>
-            <a:pPr indent="0" marL="0">
-              <a:buNone/>
-            </a:pPr>
-            <a:r>
-              <a:rPr lang="en-US" sz="1100" dirty="0">
+            <a:off x="4663440" y="4343400"/>
+            <a:ext cx="3566160" cy="347472"/>
+          </a:xfrm>
+          <a:prstGeom prst="rect">
+            <a:avLst/>
+          </a:prstGeom>
+          <a:noFill/>
+          <a:ln/>
+        </p:spPr>
+        <p:txBody>
+          <a:bodyPr wrap="square" lIns="0" tIns="0" rIns="0" bIns="0" rtlCol="0" anchor="ctr"/>
+          <a:lstStyle/>
+          <a:p>
+            <a:pPr indent="0" marL="0">
+              <a:buNone/>
+            </a:pPr>
+            <a:r>
+              <a:rPr lang="en-US" sz="1050" dirty="0">
                 <a:solidFill>
                   <a:srgbClr val="CADCFC"/>
                 </a:solidFill>
@@ -3460,9 +3793,9 @@
                 <a:ea typeface="Calibri" pitchFamily="34" charset="-122"/>
                 <a:cs typeface="Calibri" pitchFamily="34" charset="-120"/>
               </a:rPr>
-              <a:t>анализ, прогноз, рекомендации</a:t>
-            </a:r>
-            <a:endParaRPr lang="en-US" sz="1100" dirty="0"/>
+              <a:t>причина и рекомендация вместе с фактом</a:t>
+            </a:r>
+            <a:endParaRPr lang="en-US" sz="1050" dirty="0"/>
           </a:p>
         </p:txBody>
       </p:sp>
@@ -3474,12 +3807,12 @@
         </p:nvSpPr>
         <p:spPr>
           <a:xfrm>
-            <a:off x="457200" y="1143000"/>
-            <a:ext cx="2743200" cy="1280160"/>
+            <a:off x="457200" y="1097280"/>
+            <a:ext cx="2743200" cy="1143000"/>
           </a:xfrm>
           <a:prstGeom prst="roundRect">
             <a:avLst>
-              <a:gd name="adj" fmla="val 5714"/>
+              <a:gd name="adj" fmla="val 6400"/>
             </a:avLst>
           </a:prstGeom>
           <a:solidFill>
@@ -3496,7 +3829,7 @@
         </p:nvSpPr>
         <p:spPr>
           <a:xfrm>
-            <a:off x="1508760" y="1307592"/>
+            <a:off x="1508760" y="1261872"/>
             <a:ext cx="640080" cy="640080"/>
           </a:xfrm>
           <a:prstGeom prst="ellipse">
@@ -3524,7 +3857,7 @@
         </p:blipFill>
         <p:spPr>
           <a:xfrm>
-            <a:off x="1681582" y="1480414"/>
+            <a:off x="1681582" y="1434694"/>
             <a:ext cx="294437" cy="294437"/>
           </a:xfrm>
           <a:prstGeom prst="rect">
@@ -3540,7 +3873,7 @@
         </p:nvSpPr>
         <p:spPr>
           <a:xfrm>
-            <a:off x="594360" y="2011680"/>
+            <a:off x="594360" y="1965960"/>
             <a:ext cx="2468880" cy="274320"/>
           </a:xfrm>
           <a:prstGeom prst="rect">
@@ -3579,7 +3912,7 @@
         </p:nvSpPr>
         <p:spPr>
           <a:xfrm>
-            <a:off x="594360" y="2258568"/>
+            <a:off x="594360" y="2212848"/>
             <a:ext cx="2468880" cy="320040"/>
           </a:xfrm>
           <a:prstGeom prst="rect">
@@ -3635,8 +3968,8 @@
         </p:nvSpPr>
         <p:spPr>
           <a:xfrm>
-            <a:off x="3200400" y="1783080"/>
-            <a:ext cx="502920" cy="1440180"/>
+            <a:off x="3200400" y="1668780"/>
+            <a:ext cx="502920" cy="1325880"/>
           </a:xfrm>
           <a:prstGeom prst="line">
             <a:avLst/>
@@ -3658,12 +3991,12 @@
         </p:nvSpPr>
         <p:spPr>
           <a:xfrm>
-            <a:off x="457200" y="2628900"/>
-            <a:ext cx="2743200" cy="1280160"/>
+            <a:off x="457200" y="2423160"/>
+            <a:ext cx="2743200" cy="1143000"/>
           </a:xfrm>
           <a:prstGeom prst="roundRect">
             <a:avLst>
-              <a:gd name="adj" fmla="val 5714"/>
+              <a:gd name="adj" fmla="val 6400"/>
             </a:avLst>
           </a:prstGeom>
           <a:solidFill>
@@ -3680,7 +4013,7 @@
         </p:nvSpPr>
         <p:spPr>
           <a:xfrm>
-            <a:off x="1508760" y="2793492"/>
+            <a:off x="1508760" y="2587752"/>
             <a:ext cx="640080" cy="640080"/>
           </a:xfrm>
           <a:prstGeom prst="ellipse">
@@ -3708,7 +4041,7 @@
         </p:blipFill>
         <p:spPr>
           <a:xfrm>
-            <a:off x="1681582" y="2966314"/>
+            <a:off x="1681582" y="2760574"/>
             <a:ext cx="294437" cy="294437"/>
           </a:xfrm>
           <a:prstGeom prst="rect">
@@ -3724,7 +4057,7 @@
         </p:nvSpPr>
         <p:spPr>
           <a:xfrm>
-            <a:off x="594360" y="3497580"/>
+            <a:off x="594360" y="3291840"/>
             <a:ext cx="2468880" cy="274320"/>
           </a:xfrm>
           <a:prstGeom prst="rect">
@@ -3763,7 +4096,7 @@
         </p:nvSpPr>
         <p:spPr>
           <a:xfrm>
-            <a:off x="594360" y="3744468"/>
+            <a:off x="594360" y="3538728"/>
             <a:ext cx="2468880" cy="320040"/>
           </a:xfrm>
           <a:prstGeom prst="rect">
@@ -3819,8 +4152,8 @@
         </p:nvSpPr>
         <p:spPr>
           <a:xfrm>
-            <a:off x="3200400" y="3268980"/>
-            <a:ext cx="502920" cy="-45720"/>
+            <a:off x="3200400" y="2994660"/>
+            <a:ext cx="502920" cy="0"/>
           </a:xfrm>
           <a:prstGeom prst="line">
             <a:avLst/>
@@ -3842,12 +4175,12 @@
         </p:nvSpPr>
         <p:spPr>
           <a:xfrm>
-            <a:off x="457200" y="4114800"/>
-            <a:ext cx="2743200" cy="1280160"/>
+            <a:off x="457200" y="3749040"/>
+            <a:ext cx="2743200" cy="1143000"/>
           </a:xfrm>
           <a:prstGeom prst="roundRect">
             <a:avLst>
-              <a:gd name="adj" fmla="val 5714"/>
+              <a:gd name="adj" fmla="val 6400"/>
             </a:avLst>
           </a:prstGeom>
           <a:solidFill>
@@ -3864,7 +4197,7 @@
         </p:nvSpPr>
         <p:spPr>
           <a:xfrm>
-            <a:off x="1508760" y="4279392"/>
+            <a:off x="1508760" y="3913632"/>
             <a:ext cx="640080" cy="640080"/>
           </a:xfrm>
           <a:prstGeom prst="ellipse">
@@ -3892,7 +4225,7 @@
         </p:blipFill>
         <p:spPr>
           <a:xfrm>
-            <a:off x="1681582" y="4452214"/>
+            <a:off x="1681582" y="4086454"/>
             <a:ext cx="294437" cy="294437"/>
           </a:xfrm>
           <a:prstGeom prst="rect">
@@ -3908,7 +4241,7 @@
         </p:nvSpPr>
         <p:spPr>
           <a:xfrm>
-            <a:off x="594360" y="4983480"/>
+            <a:off x="594360" y="4617720"/>
             <a:ext cx="2468880" cy="274320"/>
           </a:xfrm>
           <a:prstGeom prst="rect">
@@ -3947,7 +4280,7 @@
         </p:nvSpPr>
         <p:spPr>
           <a:xfrm>
-            <a:off x="594360" y="5230368"/>
+            <a:off x="594360" y="4864608"/>
             <a:ext cx="2468880" cy="320040"/>
           </a:xfrm>
           <a:prstGeom prst="rect">
@@ -4003,8 +4336,8 @@
         </p:nvSpPr>
         <p:spPr>
           <a:xfrm>
-            <a:off x="3200400" y="4754880"/>
-            <a:ext cx="502920" cy="-1531620"/>
+            <a:off x="3200400" y="4320540"/>
+            <a:ext cx="502920" cy="-1325880"/>
           </a:xfrm>
           <a:prstGeom prst="line">
             <a:avLst/>
@@ -4026,12 +4359,12 @@
         </p:nvSpPr>
         <p:spPr>
           <a:xfrm>
-            <a:off x="9006840" y="2788920"/>
-            <a:ext cx="2743200" cy="1280160"/>
+            <a:off x="9006840" y="2423160"/>
+            <a:ext cx="2743200" cy="1143000"/>
           </a:xfrm>
           <a:prstGeom prst="roundRect">
             <a:avLst>
-              <a:gd name="adj" fmla="val 5714"/>
+              <a:gd name="adj" fmla="val 6400"/>
             </a:avLst>
           </a:prstGeom>
           <a:solidFill>
@@ -4048,7 +4381,7 @@
         </p:nvSpPr>
         <p:spPr>
           <a:xfrm>
-            <a:off x="10058400" y="2953512"/>
+            <a:off x="10058400" y="2587752"/>
             <a:ext cx="640080" cy="640080"/>
           </a:xfrm>
           <a:prstGeom prst="ellipse">
@@ -4076,7 +4409,7 @@
         </p:blipFill>
         <p:spPr>
           <a:xfrm>
-            <a:off x="10231222" y="3126334"/>
+            <a:off x="10231222" y="2760574"/>
             <a:ext cx="294437" cy="294437"/>
           </a:xfrm>
           <a:prstGeom prst="rect">
@@ -4092,7 +4425,7 @@
         </p:nvSpPr>
         <p:spPr>
           <a:xfrm>
-            <a:off x="9144000" y="3657600"/>
+            <a:off x="9144000" y="3291840"/>
             <a:ext cx="2468880" cy="274320"/>
           </a:xfrm>
           <a:prstGeom prst="rect">
@@ -4131,7 +4464,7 @@
         </p:nvSpPr>
         <p:spPr>
           <a:xfrm>
-            <a:off x="9144000" y="3904488"/>
+            <a:off x="9144000" y="3538728"/>
             <a:ext cx="2468880" cy="320040"/>
           </a:xfrm>
           <a:prstGeom prst="rect">
@@ -4156,7 +4489,7 @@
                 <a:ea typeface="Calibri" pitchFamily="34" charset="-122"/>
                 <a:cs typeface="Calibri" pitchFamily="34" charset="-120"/>
               </a:rPr>
-              <a:t>роль под вопросом:</a:t>
+              <a:t>экраны остаются знакомыми,</a:t>
             </a:r>
             <a:endParaRPr lang="en-US" sz="950" dirty="0"/>
           </a:p>
@@ -4173,7 +4506,7 @@
                 <a:ea typeface="Calibri" pitchFamily="34" charset="-122"/>
                 <a:cs typeface="Calibri" pitchFamily="34" charset="-120"/>
               </a:rPr>
-              <a:t>визуал — да, хранение — нет</a:t>
+              <a:t>данные — из единого слоя</a:t>
             </a:r>
             <a:endParaRPr lang="en-US" sz="950" dirty="0"/>
           </a:p>
@@ -4187,8 +4520,8 @@
         </p:nvSpPr>
         <p:spPr>
           <a:xfrm>
-            <a:off x="8503920" y="3223260"/>
-            <a:ext cx="502920" cy="205740"/>
+            <a:off x="8503920" y="2994660"/>
+            <a:ext cx="502920" cy="0"/>
           </a:xfrm>
           <a:prstGeom prst="line">
             <a:avLst/>
@@ -4210,15 +4543,115 @@
         </p:nvSpPr>
         <p:spPr>
           <a:xfrm>
-            <a:off x="457200" y="5532120"/>
-            <a:ext cx="11274552" cy="777240"/>
+            <a:off x="457200" y="5029200"/>
+            <a:ext cx="11274552" cy="621792"/>
           </a:xfrm>
           <a:prstGeom prst="roundRect">
             <a:avLst>
-              <a:gd name="adj" fmla="val 8235"/>
+              <a:gd name="adj" fmla="val 10294"/>
             </a:avLst>
           </a:prstGeom>
           <a:solidFill>
+            <a:srgbClr val="2A3577"/>
+          </a:solidFill>
+          <a:ln/>
+        </p:spPr>
+      </p:sp>
+      <p:sp>
+        <p:nvSpPr>
+          <p:cNvPr id="46" name="Text 36"/>
+          <p:cNvSpPr/>
+          <p:nvPr/>
+        </p:nvSpPr>
+        <p:spPr>
+          <a:xfrm>
+            <a:off x="685800" y="5084064"/>
+            <a:ext cx="10817352" cy="274320"/>
+          </a:xfrm>
+          <a:prstGeom prst="rect">
+            <a:avLst/>
+          </a:prstGeom>
+          <a:noFill/>
+          <a:ln/>
+        </p:spPr>
+        <p:txBody>
+          <a:bodyPr wrap="square" lIns="0" tIns="0" rIns="0" bIns="0" rtlCol="0" anchor="ctr"/>
+          <a:lstStyle/>
+          <a:p>
+            <a:pPr indent="0" marL="0">
+              <a:buNone/>
+            </a:pPr>
+            <a:r>
+              <a:rPr lang="en-US" sz="1150" b="1" dirty="0">
+                <a:solidFill>
+                  <a:srgbClr val="E8A33D"/>
+                </a:solidFill>
+                <a:latin typeface="Calibri" pitchFamily="34" charset="0"/>
+                <a:ea typeface="Calibri" pitchFamily="34" charset="-122"/>
+                <a:cs typeface="Calibri" pitchFamily="34" charset="-120"/>
+              </a:rPr>
+              <a:t>Почему это не станет ещё одним источником шума</a:t>
+            </a:r>
+            <a:endParaRPr lang="en-US" sz="1150" dirty="0"/>
+          </a:p>
+        </p:txBody>
+      </p:sp>
+      <p:sp>
+        <p:nvSpPr>
+          <p:cNvPr id="47" name="Text 37"/>
+          <p:cNvSpPr/>
+          <p:nvPr/>
+        </p:nvSpPr>
+        <p:spPr>
+          <a:xfrm>
+            <a:off x="685800" y="5349240"/>
+            <a:ext cx="10817352" cy="274320"/>
+          </a:xfrm>
+          <a:prstGeom prst="rect">
+            <a:avLst/>
+          </a:prstGeom>
+          <a:noFill/>
+          <a:ln/>
+        </p:spPr>
+        <p:txBody>
+          <a:bodyPr wrap="square" lIns="0" tIns="0" rIns="0" bIns="0" rtlCol="0" anchor="ctr"/>
+          <a:lstStyle/>
+          <a:p>
+            <a:pPr indent="0" marL="0">
+              <a:buNone/>
+            </a:pPr>
+            <a:r>
+              <a:rPr lang="en-US" sz="1100" dirty="0">
+                <a:solidFill>
+                  <a:srgbClr val="FFFFFF"/>
+                </a:solidFill>
+                <a:latin typeface="Calibri" pitchFamily="34" charset="0"/>
+                <a:ea typeface="Calibri" pitchFamily="34" charset="-122"/>
+                <a:cs typeface="Calibri" pitchFamily="34" charset="-120"/>
+              </a:rPr>
+              <a:t>Видите только значимое  →  всё в одном окне, без новых дашбордов  →  отклонённое не всплывает повторно</a:t>
+            </a:r>
+            <a:endParaRPr lang="en-US" sz="1100" dirty="0"/>
+          </a:p>
+        </p:txBody>
+      </p:sp>
+      <p:sp>
+        <p:nvSpPr>
+          <p:cNvPr id="48" name="Shape 38"/>
+          <p:cNvSpPr/>
+          <p:nvPr/>
+        </p:nvSpPr>
+        <p:spPr>
+          <a:xfrm>
+            <a:off x="457200" y="5788152"/>
+            <a:ext cx="11274552" cy="566928"/>
+          </a:xfrm>
+          <a:prstGeom prst="roundRect">
+            <a:avLst>
+              <a:gd name="adj" fmla="val 11290"/>
+            </a:avLst>
+          </a:prstGeom>
+          <a:solidFill>
             <a:srgbClr val="E8A33D"/>
           </a:solidFill>
           <a:ln/>
@@ -4226,30 +4659,30 @@
       </p:sp>
       <p:sp>
         <p:nvSpPr>
-          <p:cNvPr id="46" name="Text 36"/>
-          <p:cNvSpPr/>
-          <p:nvPr/>
-        </p:nvSpPr>
-        <p:spPr>
-          <a:xfrm>
-            <a:off x="731520" y="5532120"/>
-            <a:ext cx="10725912" cy="777240"/>
-          </a:xfrm>
-          <a:prstGeom prst="rect">
-            <a:avLst/>
-          </a:prstGeom>
-          <a:noFill/>
-          <a:ln/>
-        </p:spPr>
-        <p:txBody>
-          <a:bodyPr wrap="square" lIns="0" tIns="0" rIns="0" bIns="0" rtlCol="0" anchor="ctr"/>
-          <a:lstStyle/>
-          <a:p>
-            <a:pPr indent="0" marL="0">
-              <a:buNone/>
-            </a:pPr>
-            <a:r>
-              <a:rPr lang="en-US" sz="1300" b="1" dirty="0">
+          <p:cNvPr id="49" name="Text 39"/>
+          <p:cNvSpPr/>
+          <p:nvPr/>
+        </p:nvSpPr>
+        <p:spPr>
+          <a:xfrm>
+            <a:off x="731520" y="5788152"/>
+            <a:ext cx="10725912" cy="566928"/>
+          </a:xfrm>
+          <a:prstGeom prst="rect">
+            <a:avLst/>
+          </a:prstGeom>
+          <a:noFill/>
+          <a:ln/>
+        </p:spPr>
+        <p:txBody>
+          <a:bodyPr wrap="square" lIns="0" tIns="0" rIns="0" bIns="0" rtlCol="0" anchor="ctr"/>
+          <a:lstStyle/>
+          <a:p>
+            <a:pPr indent="0" marL="0">
+              <a:buNone/>
+            </a:pPr>
+            <a:r>
+              <a:rPr lang="en-US" sz="1250" b="1" dirty="0">
                 <a:solidFill>
                   <a:srgbClr val="1E2761"/>
                 </a:solidFill>
@@ -4259,13 +4692,13 @@
               </a:rPr>
               <a:t>Открытый вопрос: ролевая модель и доступ — что видят топ-менеджеры, что сотрудники, где граница</a:t>
             </a:r>
-            <a:endParaRPr lang="en-US" sz="1300" dirty="0"/>
-          </a:p>
-        </p:txBody>
-      </p:sp>
-      <p:sp>
-        <p:nvSpPr>
-          <p:cNvPr id="47" name="Text 37"/>
+            <a:endParaRPr lang="en-US" sz="1250" dirty="0"/>
+          </a:p>
+        </p:txBody>
+      </p:sp>
+      <p:sp>
+        <p:nvSpPr>
+          <p:cNvPr id="50" name="Text 40"/>
           <p:cNvSpPr/>
           <p:nvPr/>
         </p:nvSpPr>
@@ -4304,7 +4737,7 @@
       </p:sp>
       <p:sp>
         <p:nvSpPr>
-          <p:cNvPr id="48" name="Text 38"/>
+          <p:cNvPr id="51" name="Text 41"/>
           <p:cNvSpPr/>
           <p:nvPr/>
         </p:nvSpPr>
@@ -4726,11 +5159,11 @@
         <p:spPr>
           <a:xfrm>
             <a:off x="548640" y="2057400"/>
-            <a:ext cx="2743200" cy="777240"/>
+            <a:ext cx="2743200" cy="621792"/>
           </a:xfrm>
           <a:prstGeom prst="roundRect">
             <a:avLst>
-              <a:gd name="adj" fmla="val 5882"/>
+              <a:gd name="adj" fmla="val 7353"/>
             </a:avLst>
           </a:prstGeom>
           <a:solidFill>
@@ -4748,7 +5181,7 @@
         <p:spPr>
           <a:xfrm>
             <a:off x="685800" y="2057400"/>
-            <a:ext cx="2468880" cy="777240"/>
+            <a:ext cx="2468880" cy="621792"/>
           </a:xfrm>
           <a:prstGeom prst="rect">
             <a:avLst/>
@@ -4787,11 +5220,11 @@
         <p:spPr>
           <a:xfrm>
             <a:off x="3383280" y="2057400"/>
-            <a:ext cx="1972818" cy="777240"/>
+            <a:ext cx="1972818" cy="621792"/>
           </a:xfrm>
           <a:prstGeom prst="roundRect">
             <a:avLst>
-              <a:gd name="adj" fmla="val 5882"/>
+              <a:gd name="adj" fmla="val 7353"/>
             </a:avLst>
           </a:prstGeom>
           <a:solidFill>
@@ -4809,7 +5242,7 @@
         <p:spPr>
           <a:xfrm>
             <a:off x="3474720" y="2057400"/>
-            <a:ext cx="1789938" cy="777240"/>
+            <a:ext cx="1789938" cy="621792"/>
           </a:xfrm>
           <a:prstGeom prst="rect">
             <a:avLst/>
@@ -4848,11 +5281,11 @@
         <p:spPr>
           <a:xfrm>
             <a:off x="5447538" y="2057400"/>
-            <a:ext cx="1972818" cy="777240"/>
+            <a:ext cx="1972818" cy="621792"/>
           </a:xfrm>
           <a:prstGeom prst="roundRect">
             <a:avLst>
-              <a:gd name="adj" fmla="val 5882"/>
+              <a:gd name="adj" fmla="val 7353"/>
             </a:avLst>
           </a:prstGeom>
           <a:solidFill>
@@ -4870,7 +5303,7 @@
         <p:spPr>
           <a:xfrm>
             <a:off x="5538978" y="2057400"/>
-            <a:ext cx="1789938" cy="777240"/>
+            <a:ext cx="1789938" cy="621792"/>
           </a:xfrm>
           <a:prstGeom prst="rect">
             <a:avLst/>
@@ -4909,11 +5342,11 @@
         <p:spPr>
           <a:xfrm>
             <a:off x="7511796" y="2057400"/>
-            <a:ext cx="1972818" cy="777240"/>
+            <a:ext cx="1972818" cy="621792"/>
           </a:xfrm>
           <a:prstGeom prst="roundRect">
             <a:avLst>
-              <a:gd name="adj" fmla="val 5882"/>
+              <a:gd name="adj" fmla="val 7353"/>
             </a:avLst>
           </a:prstGeom>
           <a:solidFill>
@@ -4931,7 +5364,7 @@
         <p:spPr>
           <a:xfrm>
             <a:off x="7603236" y="2057400"/>
-            <a:ext cx="1789938" cy="777240"/>
+            <a:ext cx="1789938" cy="621792"/>
           </a:xfrm>
           <a:prstGeom prst="rect">
             <a:avLst/>
@@ -4970,11 +5403,11 @@
         <p:spPr>
           <a:xfrm>
             <a:off x="9576054" y="2057400"/>
-            <a:ext cx="1972818" cy="777240"/>
+            <a:ext cx="1972818" cy="621792"/>
           </a:xfrm>
           <a:prstGeom prst="roundRect">
             <a:avLst>
-              <a:gd name="adj" fmla="val 5882"/>
+              <a:gd name="adj" fmla="val 7353"/>
             </a:avLst>
           </a:prstGeom>
           <a:solidFill>
@@ -4992,7 +5425,7 @@
         <p:spPr>
           <a:xfrm>
             <a:off x="9667494" y="2057400"/>
-            <a:ext cx="1789938" cy="777240"/>
+            <a:ext cx="1789938" cy="621792"/>
           </a:xfrm>
           <a:prstGeom prst="rect">
             <a:avLst/>
@@ -5030,12 +5463,12 @@
         </p:nvSpPr>
         <p:spPr>
           <a:xfrm>
-            <a:off x="548640" y="2926080"/>
-            <a:ext cx="2743200" cy="777240"/>
+            <a:off x="548640" y="2752344"/>
+            <a:ext cx="2743200" cy="621792"/>
           </a:xfrm>
           <a:prstGeom prst="roundRect">
             <a:avLst>
-              <a:gd name="adj" fmla="val 5882"/>
+              <a:gd name="adj" fmla="val 7353"/>
             </a:avLst>
           </a:prstGeom>
           <a:solidFill>
@@ -5052,8 +5485,8 @@
         </p:nvSpPr>
         <p:spPr>
           <a:xfrm>
-            <a:off x="685800" y="2926080"/>
-            <a:ext cx="2468880" cy="777240"/>
+            <a:off x="685800" y="2752344"/>
+            <a:ext cx="2468880" cy="621792"/>
           </a:xfrm>
           <a:prstGeom prst="rect">
             <a:avLst/>
@@ -5091,12 +5524,12 @@
         </p:nvSpPr>
         <p:spPr>
           <a:xfrm>
-            <a:off x="3383280" y="2926080"/>
-            <a:ext cx="1972818" cy="777240"/>
+            <a:off x="3383280" y="2752344"/>
+            <a:ext cx="1972818" cy="621792"/>
           </a:xfrm>
           <a:prstGeom prst="roundRect">
             <a:avLst>
-              <a:gd name="adj" fmla="val 5882"/>
+              <a:gd name="adj" fmla="val 7353"/>
             </a:avLst>
           </a:prstGeom>
           <a:solidFill>
@@ -5113,8 +5546,8 @@
         </p:nvSpPr>
         <p:spPr>
           <a:xfrm>
-            <a:off x="3474720" y="2926080"/>
-            <a:ext cx="1789938" cy="777240"/>
+            <a:off x="3474720" y="2752344"/>
+            <a:ext cx="1789938" cy="621792"/>
           </a:xfrm>
           <a:prstGeom prst="rect">
             <a:avLst/>
@@ -5152,12 +5585,12 @@
         </p:nvSpPr>
         <p:spPr>
           <a:xfrm>
-            <a:off x="5447538" y="2926080"/>
-            <a:ext cx="1972818" cy="777240"/>
+            <a:off x="5447538" y="2752344"/>
+            <a:ext cx="1972818" cy="621792"/>
           </a:xfrm>
           <a:prstGeom prst="roundRect">
             <a:avLst>
-              <a:gd name="adj" fmla="val 5882"/>
+              <a:gd name="adj" fmla="val 7353"/>
             </a:avLst>
           </a:prstGeom>
           <a:solidFill>
@@ -5174,8 +5607,8 @@
         </p:nvSpPr>
         <p:spPr>
           <a:xfrm>
-            <a:off x="5538978" y="2926080"/>
-            <a:ext cx="1789938" cy="777240"/>
+            <a:off x="5538978" y="2752344"/>
+            <a:ext cx="1789938" cy="621792"/>
           </a:xfrm>
           <a:prstGeom prst="rect">
             <a:avLst/>
@@ -5213,12 +5646,12 @@
         </p:nvSpPr>
         <p:spPr>
           <a:xfrm>
-            <a:off x="7511796" y="2926080"/>
-            <a:ext cx="1972818" cy="777240"/>
+            <a:off x="7511796" y="2752344"/>
+            <a:ext cx="1972818" cy="621792"/>
           </a:xfrm>
           <a:prstGeom prst="roundRect">
             <a:avLst>
-              <a:gd name="adj" fmla="val 5882"/>
+              <a:gd name="adj" fmla="val 7353"/>
             </a:avLst>
           </a:prstGeom>
           <a:solidFill>
@@ -5235,8 +5668,8 @@
         </p:nvSpPr>
         <p:spPr>
           <a:xfrm>
-            <a:off x="7603236" y="2926080"/>
-            <a:ext cx="1789938" cy="777240"/>
+            <a:off x="7603236" y="2752344"/>
+            <a:ext cx="1789938" cy="621792"/>
           </a:xfrm>
           <a:prstGeom prst="rect">
             <a:avLst/>
@@ -5274,12 +5707,12 @@
         </p:nvSpPr>
         <p:spPr>
           <a:xfrm>
-            <a:off x="9576054" y="2926080"/>
-            <a:ext cx="1972818" cy="777240"/>
+            <a:off x="9576054" y="2752344"/>
+            <a:ext cx="1972818" cy="621792"/>
           </a:xfrm>
           <a:prstGeom prst="roundRect">
             <a:avLst>
-              <a:gd name="adj" fmla="val 5882"/>
+              <a:gd name="adj" fmla="val 7353"/>
             </a:avLst>
           </a:prstGeom>
           <a:solidFill>
@@ -5296,8 +5729,8 @@
         </p:nvSpPr>
         <p:spPr>
           <a:xfrm>
-            <a:off x="9667494" y="2926080"/>
-            <a:ext cx="1789938" cy="777240"/>
+            <a:off x="9667494" y="2752344"/>
+            <a:ext cx="1789938" cy="621792"/>
           </a:xfrm>
           <a:prstGeom prst="rect">
             <a:avLst/>
@@ -5335,12 +5768,12 @@
         </p:nvSpPr>
         <p:spPr>
           <a:xfrm>
-            <a:off x="548640" y="3794760"/>
-            <a:ext cx="2743200" cy="777240"/>
+            <a:off x="548640" y="3447288"/>
+            <a:ext cx="2743200" cy="621792"/>
           </a:xfrm>
           <a:prstGeom prst="roundRect">
             <a:avLst>
-              <a:gd name="adj" fmla="val 5882"/>
+              <a:gd name="adj" fmla="val 7353"/>
             </a:avLst>
           </a:prstGeom>
           <a:solidFill>
@@ -5357,8 +5790,8 @@
         </p:nvSpPr>
         <p:spPr>
           <a:xfrm>
-            <a:off x="685800" y="3794760"/>
-            <a:ext cx="2468880" cy="777240"/>
+            <a:off x="685800" y="3447288"/>
+            <a:ext cx="2468880" cy="621792"/>
           </a:xfrm>
           <a:prstGeom prst="rect">
             <a:avLst/>
@@ -5396,12 +5829,12 @@
         </p:nvSpPr>
         <p:spPr>
           <a:xfrm>
-            <a:off x="3383280" y="3794760"/>
-            <a:ext cx="1972818" cy="777240"/>
+            <a:off x="3383280" y="3447288"/>
+            <a:ext cx="1972818" cy="621792"/>
           </a:xfrm>
           <a:prstGeom prst="roundRect">
             <a:avLst>
-              <a:gd name="adj" fmla="val 5882"/>
+              <a:gd name="adj" fmla="val 7353"/>
             </a:avLst>
           </a:prstGeom>
           <a:solidFill>
@@ -5418,8 +5851,8 @@
         </p:nvSpPr>
         <p:spPr>
           <a:xfrm>
-            <a:off x="3474720" y="3794760"/>
-            <a:ext cx="1789938" cy="777240"/>
+            <a:off x="3474720" y="3447288"/>
+            <a:ext cx="1789938" cy="621792"/>
           </a:xfrm>
           <a:prstGeom prst="rect">
             <a:avLst/>
@@ -5457,12 +5890,12 @@
         </p:nvSpPr>
         <p:spPr>
           <a:xfrm>
-            <a:off x="5447538" y="3794760"/>
-            <a:ext cx="1972818" cy="777240"/>
+            <a:off x="5447538" y="3447288"/>
+            <a:ext cx="1972818" cy="621792"/>
           </a:xfrm>
           <a:prstGeom prst="roundRect">
             <a:avLst>
-              <a:gd name="adj" fmla="val 5882"/>
+              <a:gd name="adj" fmla="val 7353"/>
             </a:avLst>
           </a:prstGeom>
           <a:solidFill>
@@ -5479,8 +5912,8 @@
         </p:nvSpPr>
         <p:spPr>
           <a:xfrm>
-            <a:off x="5538978" y="3794760"/>
-            <a:ext cx="1789938" cy="777240"/>
+            <a:off x="5538978" y="3447288"/>
+            <a:ext cx="1789938" cy="621792"/>
           </a:xfrm>
           <a:prstGeom prst="rect">
             <a:avLst/>
@@ -5518,12 +5951,12 @@
         </p:nvSpPr>
         <p:spPr>
           <a:xfrm>
-            <a:off x="7511796" y="3794760"/>
-            <a:ext cx="1972818" cy="777240"/>
+            <a:off x="7511796" y="3447288"/>
+            <a:ext cx="1972818" cy="621792"/>
           </a:xfrm>
           <a:prstGeom prst="roundRect">
             <a:avLst>
-              <a:gd name="adj" fmla="val 5882"/>
+              <a:gd name="adj" fmla="val 7353"/>
             </a:avLst>
           </a:prstGeom>
           <a:solidFill>
@@ -5540,8 +5973,8 @@
         </p:nvSpPr>
         <p:spPr>
           <a:xfrm>
-            <a:off x="7603236" y="3794760"/>
-            <a:ext cx="1789938" cy="777240"/>
+            <a:off x="7603236" y="3447288"/>
+            <a:ext cx="1789938" cy="621792"/>
           </a:xfrm>
           <a:prstGeom prst="rect">
             <a:avLst/>
@@ -5579,12 +6012,12 @@
         </p:nvSpPr>
         <p:spPr>
           <a:xfrm>
-            <a:off x="9576054" y="3794760"/>
-            <a:ext cx="1972818" cy="777240"/>
+            <a:off x="9576054" y="3447288"/>
+            <a:ext cx="1972818" cy="621792"/>
           </a:xfrm>
           <a:prstGeom prst="roundRect">
             <a:avLst>
-              <a:gd name="adj" fmla="val 5882"/>
+              <a:gd name="adj" fmla="val 7353"/>
             </a:avLst>
           </a:prstGeom>
           <a:solidFill>
@@ -5601,8 +6034,8 @@
         </p:nvSpPr>
         <p:spPr>
           <a:xfrm>
-            <a:off x="9667494" y="3794760"/>
-            <a:ext cx="1789938" cy="777240"/>
+            <a:off x="9667494" y="3447288"/>
+            <a:ext cx="1789938" cy="621792"/>
           </a:xfrm>
           <a:prstGeom prst="rect">
             <a:avLst/>
@@ -5640,12 +6073,12 @@
         </p:nvSpPr>
         <p:spPr>
           <a:xfrm>
-            <a:off x="548640" y="4663440"/>
-            <a:ext cx="2743200" cy="777240"/>
+            <a:off x="548640" y="4142232"/>
+            <a:ext cx="2743200" cy="621792"/>
           </a:xfrm>
           <a:prstGeom prst="roundRect">
             <a:avLst>
-              <a:gd name="adj" fmla="val 5882"/>
+              <a:gd name="adj" fmla="val 7353"/>
             </a:avLst>
           </a:prstGeom>
           <a:solidFill>
@@ -5662,8 +6095,8 @@
         </p:nvSpPr>
         <p:spPr>
           <a:xfrm>
-            <a:off x="685800" y="4663440"/>
-            <a:ext cx="2468880" cy="777240"/>
+            <a:off x="685800" y="4142232"/>
+            <a:ext cx="2468880" cy="621792"/>
           </a:xfrm>
           <a:prstGeom prst="rect">
             <a:avLst/>
@@ -5687,7 +6120,7 @@
                 <a:ea typeface="Calibri" pitchFamily="34" charset="-122"/>
                 <a:cs typeface="Calibri" pitchFamily="34" charset="-120"/>
               </a:rPr>
-              <a:t>Внешние источники (LossHunter и др.)</a:t>
+              <a:t>Governance (курация, пороги)</a:t>
             </a:r>
             <a:endParaRPr lang="en-US" sz="1150" dirty="0"/>
           </a:p>
@@ -5701,12 +6134,12 @@
         </p:nvSpPr>
         <p:spPr>
           <a:xfrm>
-            <a:off x="3383280" y="4663440"/>
-            <a:ext cx="1972818" cy="777240"/>
+            <a:off x="3383280" y="4142232"/>
+            <a:ext cx="1972818" cy="621792"/>
           </a:xfrm>
           <a:prstGeom prst="roundRect">
             <a:avLst>
-              <a:gd name="adj" fmla="val 5882"/>
+              <a:gd name="adj" fmla="val 7353"/>
             </a:avLst>
           </a:prstGeom>
           <a:solidFill>
@@ -5723,8 +6156,8 @@
         </p:nvSpPr>
         <p:spPr>
           <a:xfrm>
-            <a:off x="3474720" y="4663440"/>
-            <a:ext cx="1789938" cy="777240"/>
+            <a:off x="3474720" y="4142232"/>
+            <a:ext cx="1789938" cy="621792"/>
           </a:xfrm>
           <a:prstGeom prst="rect">
             <a:avLst/>
@@ -5748,7 +6181,7 @@
                 <a:ea typeface="Calibri" pitchFamily="34" charset="-122"/>
                 <a:cs typeface="Calibri" pitchFamily="34" charset="-120"/>
               </a:rPr>
-              <a:t>Оценка интеграции</a:t>
+              <a:t>Ручные правила</a:t>
             </a:r>
             <a:endParaRPr lang="en-US" sz="1050" dirty="0"/>
           </a:p>
@@ -5762,12 +6195,12 @@
         </p:nvSpPr>
         <p:spPr>
           <a:xfrm>
-            <a:off x="5447538" y="4663440"/>
-            <a:ext cx="1972818" cy="777240"/>
+            <a:off x="5447538" y="4142232"/>
+            <a:ext cx="1972818" cy="621792"/>
           </a:xfrm>
           <a:prstGeom prst="roundRect">
             <a:avLst>
-              <a:gd name="adj" fmla="val 5882"/>
+              <a:gd name="adj" fmla="val 7353"/>
             </a:avLst>
           </a:prstGeom>
           <a:solidFill>
@@ -5784,8 +6217,8 @@
         </p:nvSpPr>
         <p:spPr>
           <a:xfrm>
-            <a:off x="5538978" y="4663440"/>
-            <a:ext cx="1789938" cy="777240"/>
+            <a:off x="5538978" y="4142232"/>
+            <a:ext cx="1789938" cy="621792"/>
           </a:xfrm>
           <a:prstGeom prst="rect">
             <a:avLst/>
@@ -5809,7 +6242,7 @@
                 <a:ea typeface="Calibri" pitchFamily="34" charset="-122"/>
                 <a:cs typeface="Calibri" pitchFamily="34" charset="-120"/>
               </a:rPr>
-              <a:t>Пилот подключения</a:t>
+              <a:t>Базовый порог значимости</a:t>
             </a:r>
             <a:endParaRPr lang="en-US" sz="1050" dirty="0"/>
           </a:p>
@@ -5823,12 +6256,12 @@
         </p:nvSpPr>
         <p:spPr>
           <a:xfrm>
-            <a:off x="7511796" y="4663440"/>
-            <a:ext cx="1972818" cy="777240"/>
+            <a:off x="7511796" y="4142232"/>
+            <a:ext cx="1972818" cy="621792"/>
           </a:xfrm>
           <a:prstGeom prst="roundRect">
             <a:avLst>
-              <a:gd name="adj" fmla="val 5882"/>
+              <a:gd name="adj" fmla="val 7353"/>
             </a:avLst>
           </a:prstGeom>
           <a:solidFill>
@@ -5845,8 +6278,8 @@
         </p:nvSpPr>
         <p:spPr>
           <a:xfrm>
-            <a:off x="7603236" y="4663440"/>
-            <a:ext cx="1789938" cy="777240"/>
+            <a:off x="7603236" y="4142232"/>
+            <a:ext cx="1789938" cy="621792"/>
           </a:xfrm>
           <a:prstGeom prst="rect">
             <a:avLst/>
@@ -5870,7 +6303,7 @@
                 <a:ea typeface="Calibri" pitchFamily="34" charset="-122"/>
                 <a:cs typeface="Calibri" pitchFamily="34" charset="-120"/>
               </a:rPr>
-              <a:t>В едином окне</a:t>
+              <a:t>Курация + единый канал</a:t>
             </a:r>
             <a:endParaRPr lang="en-US" sz="1050" dirty="0"/>
           </a:p>
@@ -5884,12 +6317,12 @@
         </p:nvSpPr>
         <p:spPr>
           <a:xfrm>
-            <a:off x="9576054" y="4663440"/>
-            <a:ext cx="1972818" cy="777240"/>
+            <a:off x="9576054" y="4142232"/>
+            <a:ext cx="1972818" cy="621792"/>
           </a:xfrm>
           <a:prstGeom prst="roundRect">
             <a:avLst>
-              <a:gd name="adj" fmla="val 5882"/>
+              <a:gd name="adj" fmla="val 7353"/>
             </a:avLst>
           </a:prstGeom>
           <a:solidFill>
@@ -5906,8 +6339,8 @@
         </p:nvSpPr>
         <p:spPr>
           <a:xfrm>
-            <a:off x="9667494" y="4663440"/>
-            <a:ext cx="1789938" cy="777240"/>
+            <a:off x="9667494" y="4142232"/>
+            <a:ext cx="1789938" cy="621792"/>
           </a:xfrm>
           <a:prstGeom prst="rect">
             <a:avLst/>
@@ -5931,7 +6364,7 @@
                 <a:ea typeface="Calibri" pitchFamily="34" charset="-122"/>
                 <a:cs typeface="Calibri" pitchFamily="34" charset="-120"/>
               </a:rPr>
-              <a:t>Полная интеграция</a:t>
+              <a:t>Самообучающиеся правила</a:t>
             </a:r>
             <a:endParaRPr lang="en-US" sz="1050" dirty="0"/>
           </a:p>
@@ -5945,12 +6378,12 @@
         </p:nvSpPr>
         <p:spPr>
           <a:xfrm>
-            <a:off x="548640" y="5532120"/>
-            <a:ext cx="2743200" cy="777240"/>
+            <a:off x="548640" y="4837176"/>
+            <a:ext cx="2743200" cy="621792"/>
           </a:xfrm>
           <a:prstGeom prst="roundRect">
             <a:avLst>
-              <a:gd name="adj" fmla="val 5882"/>
+              <a:gd name="adj" fmla="val 7353"/>
             </a:avLst>
           </a:prstGeom>
           <a:solidFill>
@@ -5967,8 +6400,8 @@
         </p:nvSpPr>
         <p:spPr>
           <a:xfrm>
-            <a:off x="685800" y="5532120"/>
-            <a:ext cx="2468880" cy="777240"/>
+            <a:off x="685800" y="4837176"/>
+            <a:ext cx="2468880" cy="621792"/>
           </a:xfrm>
           <a:prstGeom prst="rect">
             <a:avLst/>
@@ -5992,7 +6425,7 @@
                 <a:ea typeface="Calibri" pitchFamily="34" charset="-122"/>
                 <a:cs typeface="Calibri" pitchFamily="34" charset="-120"/>
               </a:rPr>
-              <a:t>Роль текущего BI</a:t>
+              <a:t>Внешние источники (LossHunter и др.)</a:t>
             </a:r>
             <a:endParaRPr lang="en-US" sz="1150" dirty="0"/>
           </a:p>
@@ -6006,12 +6439,12 @@
         </p:nvSpPr>
         <p:spPr>
           <a:xfrm>
-            <a:off x="3383280" y="5532120"/>
-            <a:ext cx="1972818" cy="777240"/>
+            <a:off x="3383280" y="4837176"/>
+            <a:ext cx="1972818" cy="621792"/>
           </a:xfrm>
           <a:prstGeom prst="roundRect">
             <a:avLst>
-              <a:gd name="adj" fmla="val 5882"/>
+              <a:gd name="adj" fmla="val 7353"/>
             </a:avLst>
           </a:prstGeom>
           <a:solidFill>
@@ -6028,8 +6461,8 @@
         </p:nvSpPr>
         <p:spPr>
           <a:xfrm>
-            <a:off x="3474720" y="5532120"/>
-            <a:ext cx="1789938" cy="777240"/>
+            <a:off x="3474720" y="4837176"/>
+            <a:ext cx="1789938" cy="621792"/>
           </a:xfrm>
           <a:prstGeom prst="rect">
             <a:avLst/>
@@ -6053,7 +6486,7 @@
                 <a:ea typeface="Calibri" pitchFamily="34" charset="-122"/>
                 <a:cs typeface="Calibri" pitchFamily="34" charset="-120"/>
               </a:rPr>
-              <a:t>Как сейчас</a:t>
+              <a:t>Оценка интеграции</a:t>
             </a:r>
             <a:endParaRPr lang="en-US" sz="1050" dirty="0"/>
           </a:p>
@@ -6067,12 +6500,12 @@
         </p:nvSpPr>
         <p:spPr>
           <a:xfrm>
-            <a:off x="5447538" y="5532120"/>
-            <a:ext cx="1972818" cy="777240"/>
+            <a:off x="5447538" y="4837176"/>
+            <a:ext cx="1972818" cy="621792"/>
           </a:xfrm>
           <a:prstGeom prst="roundRect">
             <a:avLst>
-              <a:gd name="adj" fmla="val 5882"/>
+              <a:gd name="adj" fmla="val 7353"/>
             </a:avLst>
           </a:prstGeom>
           <a:solidFill>
@@ -6089,8 +6522,8 @@
         </p:nvSpPr>
         <p:spPr>
           <a:xfrm>
-            <a:off x="5538978" y="5532120"/>
-            <a:ext cx="1789938" cy="777240"/>
+            <a:off x="5538978" y="4837176"/>
+            <a:ext cx="1789938" cy="621792"/>
           </a:xfrm>
           <a:prstGeom prst="rect">
             <a:avLst/>
@@ -6114,7 +6547,7 @@
                 <a:ea typeface="Calibri" pitchFamily="34" charset="-122"/>
                 <a:cs typeface="Calibri" pitchFamily="34" charset="-120"/>
               </a:rPr>
-              <a:t>Визуал + новые данные</a:t>
+              <a:t>Пилот подключения</a:t>
             </a:r>
             <a:endParaRPr lang="en-US" sz="1050" dirty="0"/>
           </a:p>
@@ -6128,12 +6561,12 @@
         </p:nvSpPr>
         <p:spPr>
           <a:xfrm>
-            <a:off x="7511796" y="5532120"/>
-            <a:ext cx="1972818" cy="777240"/>
+            <a:off x="7511796" y="4837176"/>
+            <a:ext cx="1972818" cy="621792"/>
           </a:xfrm>
           <a:prstGeom prst="roundRect">
             <a:avLst>
-              <a:gd name="adj" fmla="val 5882"/>
+              <a:gd name="adj" fmla="val 7353"/>
             </a:avLst>
           </a:prstGeom>
           <a:solidFill>
@@ -6150,8 +6583,8 @@
         </p:nvSpPr>
         <p:spPr>
           <a:xfrm>
-            <a:off x="7603236" y="5532120"/>
-            <a:ext cx="1789938" cy="777240"/>
+            <a:off x="7603236" y="4837176"/>
+            <a:ext cx="1789938" cy="621792"/>
           </a:xfrm>
           <a:prstGeom prst="rect">
             <a:avLst/>
@@ -6175,7 +6608,7 @@
                 <a:ea typeface="Calibri" pitchFamily="34" charset="-122"/>
                 <a:cs typeface="Calibri" pitchFamily="34" charset="-120"/>
               </a:rPr>
-              <a:t>Вывод части дублей</a:t>
+              <a:t>В едином окне</a:t>
             </a:r>
             <a:endParaRPr lang="en-US" sz="1050" dirty="0"/>
           </a:p>
@@ -6189,12 +6622,12 @@
         </p:nvSpPr>
         <p:spPr>
           <a:xfrm>
-            <a:off x="9576054" y="5532120"/>
-            <a:ext cx="1972818" cy="777240"/>
+            <a:off x="9576054" y="4837176"/>
+            <a:ext cx="1972818" cy="621792"/>
           </a:xfrm>
           <a:prstGeom prst="roundRect">
             <a:avLst>
-              <a:gd name="adj" fmla="val 5882"/>
+              <a:gd name="adj" fmla="val 7353"/>
             </a:avLst>
           </a:prstGeom>
           <a:solidFill>
@@ -6211,8 +6644,313 @@
         </p:nvSpPr>
         <p:spPr>
           <a:xfrm>
+            <a:off x="9667494" y="4837176"/>
+            <a:ext cx="1789938" cy="621792"/>
+          </a:xfrm>
+          <a:prstGeom prst="rect">
+            <a:avLst/>
+          </a:prstGeom>
+          <a:noFill/>
+          <a:ln/>
+        </p:spPr>
+        <p:txBody>
+          <a:bodyPr wrap="square" lIns="0" tIns="0" rIns="0" bIns="0" rtlCol="0" anchor="ctr"/>
+          <a:lstStyle/>
+          <a:p>
+            <a:pPr algn="ctr" indent="0" marL="0">
+              <a:buNone/>
+            </a:pPr>
+            <a:r>
+              <a:rPr lang="en-US" sz="1050" dirty="0">
+                <a:solidFill>
+                  <a:srgbClr val="2A2A2A"/>
+                </a:solidFill>
+                <a:latin typeface="Calibri" pitchFamily="34" charset="0"/>
+                <a:ea typeface="Calibri" pitchFamily="34" charset="-122"/>
+                <a:cs typeface="Calibri" pitchFamily="34" charset="-120"/>
+              </a:rPr>
+              <a:t>Полная интеграция</a:t>
+            </a:r>
+            <a:endParaRPr lang="en-US" sz="1050" dirty="0"/>
+          </a:p>
+        </p:txBody>
+      </p:sp>
+      <p:sp>
+        <p:nvSpPr>
+          <p:cNvPr id="63" name="Shape 61"/>
+          <p:cNvSpPr/>
+          <p:nvPr/>
+        </p:nvSpPr>
+        <p:spPr>
+          <a:xfrm>
+            <a:off x="548640" y="5532120"/>
+            <a:ext cx="2743200" cy="621792"/>
+          </a:xfrm>
+          <a:prstGeom prst="roundRect">
+            <a:avLst>
+              <a:gd name="adj" fmla="val 7353"/>
+            </a:avLst>
+          </a:prstGeom>
+          <a:solidFill>
+            <a:srgbClr val="2A3577"/>
+          </a:solidFill>
+          <a:ln/>
+        </p:spPr>
+      </p:sp>
+      <p:sp>
+        <p:nvSpPr>
+          <p:cNvPr id="64" name="Text 62"/>
+          <p:cNvSpPr/>
+          <p:nvPr/>
+        </p:nvSpPr>
+        <p:spPr>
+          <a:xfrm>
+            <a:off x="685800" y="5532120"/>
+            <a:ext cx="2468880" cy="621792"/>
+          </a:xfrm>
+          <a:prstGeom prst="rect">
+            <a:avLst/>
+          </a:prstGeom>
+          <a:noFill/>
+          <a:ln/>
+        </p:spPr>
+        <p:txBody>
+          <a:bodyPr wrap="square" lIns="0" tIns="0" rIns="0" bIns="0" rtlCol="0" anchor="ctr"/>
+          <a:lstStyle/>
+          <a:p>
+            <a:pPr indent="0" marL="0">
+              <a:buNone/>
+            </a:pPr>
+            <a:r>
+              <a:rPr lang="en-US" sz="1150" b="1" dirty="0">
+                <a:solidFill>
+                  <a:srgbClr val="FFFFFF"/>
+                </a:solidFill>
+                <a:latin typeface="Calibri" pitchFamily="34" charset="0"/>
+                <a:ea typeface="Calibri" pitchFamily="34" charset="-122"/>
+                <a:cs typeface="Calibri" pitchFamily="34" charset="-120"/>
+              </a:rPr>
+              <a:t>Роль текущего BI</a:t>
+            </a:r>
+            <a:endParaRPr lang="en-US" sz="1150" dirty="0"/>
+          </a:p>
+        </p:txBody>
+      </p:sp>
+      <p:sp>
+        <p:nvSpPr>
+          <p:cNvPr id="65" name="Shape 63"/>
+          <p:cNvSpPr/>
+          <p:nvPr/>
+        </p:nvSpPr>
+        <p:spPr>
+          <a:xfrm>
+            <a:off x="3383280" y="5532120"/>
+            <a:ext cx="1972818" cy="621792"/>
+          </a:xfrm>
+          <a:prstGeom prst="roundRect">
+            <a:avLst>
+              <a:gd name="adj" fmla="val 7353"/>
+            </a:avLst>
+          </a:prstGeom>
+          <a:solidFill>
+            <a:srgbClr val="E8A33D"/>
+          </a:solidFill>
+          <a:ln/>
+        </p:spPr>
+      </p:sp>
+      <p:sp>
+        <p:nvSpPr>
+          <p:cNvPr id="66" name="Text 64"/>
+          <p:cNvSpPr/>
+          <p:nvPr/>
+        </p:nvSpPr>
+        <p:spPr>
+          <a:xfrm>
+            <a:off x="3474720" y="5532120"/>
+            <a:ext cx="1789938" cy="621792"/>
+          </a:xfrm>
+          <a:prstGeom prst="rect">
+            <a:avLst/>
+          </a:prstGeom>
+          <a:noFill/>
+          <a:ln/>
+        </p:spPr>
+        <p:txBody>
+          <a:bodyPr wrap="square" lIns="0" tIns="0" rIns="0" bIns="0" rtlCol="0" anchor="ctr"/>
+          <a:lstStyle/>
+          <a:p>
+            <a:pPr algn="ctr" indent="0" marL="0">
+              <a:buNone/>
+            </a:pPr>
+            <a:r>
+              <a:rPr lang="en-US" sz="1050" b="1" dirty="0">
+                <a:solidFill>
+                  <a:srgbClr val="1E2761"/>
+                </a:solidFill>
+                <a:latin typeface="Calibri" pitchFamily="34" charset="0"/>
+                <a:ea typeface="Calibri" pitchFamily="34" charset="-122"/>
+                <a:cs typeface="Calibri" pitchFamily="34" charset="-120"/>
+              </a:rPr>
+              <a:t>Как сейчас</a:t>
+            </a:r>
+            <a:endParaRPr lang="en-US" sz="1050" dirty="0"/>
+          </a:p>
+        </p:txBody>
+      </p:sp>
+      <p:sp>
+        <p:nvSpPr>
+          <p:cNvPr id="67" name="Shape 65"/>
+          <p:cNvSpPr/>
+          <p:nvPr/>
+        </p:nvSpPr>
+        <p:spPr>
+          <a:xfrm>
+            <a:off x="5447538" y="5532120"/>
+            <a:ext cx="1972818" cy="621792"/>
+          </a:xfrm>
+          <a:prstGeom prst="roundRect">
+            <a:avLst>
+              <a:gd name="adj" fmla="val 7353"/>
+            </a:avLst>
+          </a:prstGeom>
+          <a:solidFill>
+            <a:srgbClr val="EAEEF7"/>
+          </a:solidFill>
+          <a:ln/>
+        </p:spPr>
+      </p:sp>
+      <p:sp>
+        <p:nvSpPr>
+          <p:cNvPr id="68" name="Text 66"/>
+          <p:cNvSpPr/>
+          <p:nvPr/>
+        </p:nvSpPr>
+        <p:spPr>
+          <a:xfrm>
+            <a:off x="5538978" y="5532120"/>
+            <a:ext cx="1789938" cy="621792"/>
+          </a:xfrm>
+          <a:prstGeom prst="rect">
+            <a:avLst/>
+          </a:prstGeom>
+          <a:noFill/>
+          <a:ln/>
+        </p:spPr>
+        <p:txBody>
+          <a:bodyPr wrap="square" lIns="0" tIns="0" rIns="0" bIns="0" rtlCol="0" anchor="ctr"/>
+          <a:lstStyle/>
+          <a:p>
+            <a:pPr algn="ctr" indent="0" marL="0">
+              <a:buNone/>
+            </a:pPr>
+            <a:r>
+              <a:rPr lang="en-US" sz="1050" dirty="0">
+                <a:solidFill>
+                  <a:srgbClr val="2A2A2A"/>
+                </a:solidFill>
+                <a:latin typeface="Calibri" pitchFamily="34" charset="0"/>
+                <a:ea typeface="Calibri" pitchFamily="34" charset="-122"/>
+                <a:cs typeface="Calibri" pitchFamily="34" charset="-120"/>
+              </a:rPr>
+              <a:t>Визуал + новые данные</a:t>
+            </a:r>
+            <a:endParaRPr lang="en-US" sz="1050" dirty="0"/>
+          </a:p>
+        </p:txBody>
+      </p:sp>
+      <p:sp>
+        <p:nvSpPr>
+          <p:cNvPr id="69" name="Shape 67"/>
+          <p:cNvSpPr/>
+          <p:nvPr/>
+        </p:nvSpPr>
+        <p:spPr>
+          <a:xfrm>
+            <a:off x="7511796" y="5532120"/>
+            <a:ext cx="1972818" cy="621792"/>
+          </a:xfrm>
+          <a:prstGeom prst="roundRect">
+            <a:avLst>
+              <a:gd name="adj" fmla="val 7353"/>
+            </a:avLst>
+          </a:prstGeom>
+          <a:solidFill>
+            <a:srgbClr val="EAEEF7"/>
+          </a:solidFill>
+          <a:ln/>
+        </p:spPr>
+      </p:sp>
+      <p:sp>
+        <p:nvSpPr>
+          <p:cNvPr id="70" name="Text 68"/>
+          <p:cNvSpPr/>
+          <p:nvPr/>
+        </p:nvSpPr>
+        <p:spPr>
+          <a:xfrm>
+            <a:off x="7603236" y="5532120"/>
+            <a:ext cx="1789938" cy="621792"/>
+          </a:xfrm>
+          <a:prstGeom prst="rect">
+            <a:avLst/>
+          </a:prstGeom>
+          <a:noFill/>
+          <a:ln/>
+        </p:spPr>
+        <p:txBody>
+          <a:bodyPr wrap="square" lIns="0" tIns="0" rIns="0" bIns="0" rtlCol="0" anchor="ctr"/>
+          <a:lstStyle/>
+          <a:p>
+            <a:pPr algn="ctr" indent="0" marL="0">
+              <a:buNone/>
+            </a:pPr>
+            <a:r>
+              <a:rPr lang="en-US" sz="1050" dirty="0">
+                <a:solidFill>
+                  <a:srgbClr val="2A2A2A"/>
+                </a:solidFill>
+                <a:latin typeface="Calibri" pitchFamily="34" charset="0"/>
+                <a:ea typeface="Calibri" pitchFamily="34" charset="-122"/>
+                <a:cs typeface="Calibri" pitchFamily="34" charset="-120"/>
+              </a:rPr>
+              <a:t>Вывод части дублей</a:t>
+            </a:r>
+            <a:endParaRPr lang="en-US" sz="1050" dirty="0"/>
+          </a:p>
+        </p:txBody>
+      </p:sp>
+      <p:sp>
+        <p:nvSpPr>
+          <p:cNvPr id="71" name="Shape 69"/>
+          <p:cNvSpPr/>
+          <p:nvPr/>
+        </p:nvSpPr>
+        <p:spPr>
+          <a:xfrm>
+            <a:off x="9576054" y="5532120"/>
+            <a:ext cx="1972818" cy="621792"/>
+          </a:xfrm>
+          <a:prstGeom prst="roundRect">
+            <a:avLst>
+              <a:gd name="adj" fmla="val 7353"/>
+            </a:avLst>
+          </a:prstGeom>
+          <a:solidFill>
+            <a:srgbClr val="EAEEF7"/>
+          </a:solidFill>
+          <a:ln/>
+        </p:spPr>
+      </p:sp>
+      <p:sp>
+        <p:nvSpPr>
+          <p:cNvPr id="72" name="Text 70"/>
+          <p:cNvSpPr/>
+          <p:nvPr/>
+        </p:nvSpPr>
+        <p:spPr>
+          <a:xfrm>
             <a:off x="9667494" y="5532120"/>
-            <a:ext cx="1789938" cy="777240"/>
+            <a:ext cx="1789938" cy="621792"/>
           </a:xfrm>
           <a:prstGeom prst="rect">
             <a:avLst/>
@@ -6236,7 +6974,7 @@
                 <a:ea typeface="Calibri" pitchFamily="34" charset="-122"/>
                 <a:cs typeface="Calibri" pitchFamily="34" charset="-120"/>
               </a:rPr>
-              <a:t>Один из фронтов поверх единого слоя</a:t>
+              <a:t>Один фронт среди прочих</a:t>
             </a:r>
             <a:endParaRPr lang="en-US" sz="1050" dirty="0"/>
           </a:p>
@@ -6244,7 +6982,7 @@
       </p:sp>
       <p:sp>
         <p:nvSpPr>
-          <p:cNvPr id="63" name="Text 61"/>
+          <p:cNvPr id="73" name="Text 71"/>
           <p:cNvSpPr/>
           <p:nvPr/>
         </p:nvSpPr>
@@ -6283,7 +7021,7 @@
       </p:sp>
       <p:sp>
         <p:nvSpPr>
-          <p:cNvPr id="64" name="Text 62"/>
+          <p:cNvPr id="74" name="Text 72"/>
           <p:cNvSpPr/>
           <p:nvPr/>
         </p:nvSpPr>
